--- a/#나를_좋아하는_사람에게/images/사옥.pptx
+++ b/#나를_좋아하는_사람에게/images/사옥.pptx
@@ -11,6 +11,7 @@
     <p:sldId id="263" r:id="rId5"/>
     <p:sldId id="262" r:id="rId6"/>
     <p:sldId id="259" r:id="rId7"/>
+    <p:sldId id="264" r:id="rId8"/>
   </p:sldIdLst>
   <p:sldSz cx="12192000" cy="6858000"/>
   <p:notesSz cx="6858000" cy="9144000"/>
@@ -19552,66 +19553,6 @@
         </p:sp>
         <p:sp>
           <p:nvSpPr>
-            <p:cNvPr id="4" name="직사각형 3">
-              <a:extLst>
-                <a:ext uri="{FF2B5EF4-FFF2-40B4-BE49-F238E27FC236}">
-                  <a16:creationId xmlns:a16="http://schemas.microsoft.com/office/drawing/2014/main" id="{2814A790-C003-43CD-51D6-42248746E016}"/>
-                </a:ext>
-              </a:extLst>
-            </p:cNvPr>
-            <p:cNvSpPr/>
-            <p:nvPr/>
-          </p:nvSpPr>
-          <p:spPr>
-            <a:xfrm>
-              <a:off x="1427018" y="5538930"/>
-              <a:ext cx="9337964" cy="871106"/>
-            </a:xfrm>
-            <a:prstGeom prst="rect">
-              <a:avLst/>
-            </a:prstGeom>
-            <a:solidFill>
-              <a:schemeClr val="bg1"/>
-            </a:solidFill>
-            <a:ln>
-              <a:solidFill>
-                <a:schemeClr val="tx1"/>
-              </a:solidFill>
-            </a:ln>
-          </p:spPr>
-          <p:style>
-            <a:lnRef idx="2">
-              <a:schemeClr val="accent1">
-                <a:shade val="15000"/>
-              </a:schemeClr>
-            </a:lnRef>
-            <a:fillRef idx="1">
-              <a:schemeClr val="accent1"/>
-            </a:fillRef>
-            <a:effectRef idx="0">
-              <a:schemeClr val="accent1"/>
-            </a:effectRef>
-            <a:fontRef idx="minor">
-              <a:schemeClr val="lt1"/>
-            </a:fontRef>
-          </p:style>
-          <p:txBody>
-            <a:bodyPr rtlCol="0" anchor="ctr"/>
-            <a:lstStyle/>
-            <a:p>
-              <a:pPr algn="ctr"/>
-              <a:endParaRPr lang="ko-KR" altLang="en-US" sz="1000">
-                <a:solidFill>
-                  <a:schemeClr val="tx1"/>
-                </a:solidFill>
-                <a:latin typeface="바탕체" panose="02030609000101010101" pitchFamily="17" charset="-127"/>
-                <a:ea typeface="바탕체" panose="02030609000101010101" pitchFamily="17" charset="-127"/>
-              </a:endParaRPr>
-            </a:p>
-          </p:txBody>
-        </p:sp>
-        <p:sp>
-          <p:nvSpPr>
             <p:cNvPr id="191" name="직사각형 190">
               <a:extLst>
                 <a:ext uri="{FF2B5EF4-FFF2-40B4-BE49-F238E27FC236}">
@@ -19865,6 +19806,66 @@
             </p:txBody>
           </p:sp>
         </p:grpSp>
+        <p:sp>
+          <p:nvSpPr>
+            <p:cNvPr id="4" name="직사각형 3">
+              <a:extLst>
+                <a:ext uri="{FF2B5EF4-FFF2-40B4-BE49-F238E27FC236}">
+                  <a16:creationId xmlns:a16="http://schemas.microsoft.com/office/drawing/2014/main" id="{2814A790-C003-43CD-51D6-42248746E016}"/>
+                </a:ext>
+              </a:extLst>
+            </p:cNvPr>
+            <p:cNvSpPr/>
+            <p:nvPr/>
+          </p:nvSpPr>
+          <p:spPr>
+            <a:xfrm>
+              <a:off x="1427018" y="5250730"/>
+              <a:ext cx="9337964" cy="1159306"/>
+            </a:xfrm>
+            <a:prstGeom prst="rect">
+              <a:avLst/>
+            </a:prstGeom>
+            <a:solidFill>
+              <a:schemeClr val="bg1"/>
+            </a:solidFill>
+            <a:ln>
+              <a:solidFill>
+                <a:schemeClr val="tx1"/>
+              </a:solidFill>
+            </a:ln>
+          </p:spPr>
+          <p:style>
+            <a:lnRef idx="2">
+              <a:schemeClr val="accent1">
+                <a:shade val="15000"/>
+              </a:schemeClr>
+            </a:lnRef>
+            <a:fillRef idx="1">
+              <a:schemeClr val="accent1"/>
+            </a:fillRef>
+            <a:effectRef idx="0">
+              <a:schemeClr val="accent1"/>
+            </a:effectRef>
+            <a:fontRef idx="minor">
+              <a:schemeClr val="lt1"/>
+            </a:fontRef>
+          </p:style>
+          <p:txBody>
+            <a:bodyPr rtlCol="0" anchor="ctr"/>
+            <a:lstStyle/>
+            <a:p>
+              <a:pPr algn="ctr"/>
+              <a:endParaRPr lang="ko-KR" altLang="en-US" sz="1000">
+                <a:solidFill>
+                  <a:schemeClr val="tx1"/>
+                </a:solidFill>
+                <a:latin typeface="바탕체" panose="02030609000101010101" pitchFamily="17" charset="-127"/>
+                <a:ea typeface="바탕체" panose="02030609000101010101" pitchFamily="17" charset="-127"/>
+              </a:endParaRPr>
+            </a:p>
+          </p:txBody>
+        </p:sp>
       </p:grpSp>
     </p:spTree>
     <p:extLst>
@@ -19904,6 +19905,317 @@
       </p:grpSpPr>
       <p:grpSp>
         <p:nvGrpSpPr>
+          <p:cNvPr id="39" name="그룹 38">
+            <a:extLst>
+              <a:ext uri="{FF2B5EF4-FFF2-40B4-BE49-F238E27FC236}">
+                <a16:creationId xmlns:a16="http://schemas.microsoft.com/office/drawing/2014/main" id="{DA9D126F-F716-0CAE-97DB-20FECCF71673}"/>
+              </a:ext>
+            </a:extLst>
+          </p:cNvPr>
+          <p:cNvGrpSpPr/>
+          <p:nvPr/>
+        </p:nvGrpSpPr>
+        <p:grpSpPr>
+          <a:xfrm>
+            <a:off x="3488272" y="4952747"/>
+            <a:ext cx="1993482" cy="586182"/>
+            <a:chOff x="6810769" y="5348988"/>
+            <a:chExt cx="1993482" cy="45719"/>
+          </a:xfrm>
+        </p:grpSpPr>
+        <p:sp>
+          <p:nvSpPr>
+            <p:cNvPr id="30" name="직사각형 29">
+              <a:extLst>
+                <a:ext uri="{FF2B5EF4-FFF2-40B4-BE49-F238E27FC236}">
+                  <a16:creationId xmlns:a16="http://schemas.microsoft.com/office/drawing/2014/main" id="{2BCBE302-7743-F483-0D9B-092A5F8F1EAD}"/>
+                </a:ext>
+              </a:extLst>
+            </p:cNvPr>
+            <p:cNvSpPr/>
+            <p:nvPr/>
+          </p:nvSpPr>
+          <p:spPr>
+            <a:xfrm>
+              <a:off x="8149779" y="5348988"/>
+              <a:ext cx="225666" cy="45719"/>
+            </a:xfrm>
+            <a:prstGeom prst="rect">
+              <a:avLst/>
+            </a:prstGeom>
+            <a:noFill/>
+            <a:ln w="9525">
+              <a:solidFill>
+                <a:schemeClr val="tx1"/>
+              </a:solidFill>
+            </a:ln>
+          </p:spPr>
+          <p:style>
+            <a:lnRef idx="2">
+              <a:schemeClr val="accent1">
+                <a:shade val="15000"/>
+              </a:schemeClr>
+            </a:lnRef>
+            <a:fillRef idx="1">
+              <a:schemeClr val="accent1"/>
+            </a:fillRef>
+            <a:effectRef idx="0">
+              <a:schemeClr val="accent1"/>
+            </a:effectRef>
+            <a:fontRef idx="minor">
+              <a:schemeClr val="lt1"/>
+            </a:fontRef>
+          </p:style>
+          <p:txBody>
+            <a:bodyPr rtlCol="0" anchor="ctr"/>
+            <a:lstStyle/>
+            <a:p>
+              <a:pPr algn="ctr"/>
+              <a:endParaRPr lang="ko-KR" altLang="en-US" sz="1000">
+                <a:solidFill>
+                  <a:schemeClr val="tx1"/>
+                </a:solidFill>
+                <a:latin typeface="바탕체" panose="02030609000101010101" pitchFamily="17" charset="-127"/>
+                <a:ea typeface="바탕체" panose="02030609000101010101" pitchFamily="17" charset="-127"/>
+              </a:endParaRPr>
+            </a:p>
+          </p:txBody>
+        </p:sp>
+        <p:sp>
+          <p:nvSpPr>
+            <p:cNvPr id="32" name="직사각형 31">
+              <a:extLst>
+                <a:ext uri="{FF2B5EF4-FFF2-40B4-BE49-F238E27FC236}">
+                  <a16:creationId xmlns:a16="http://schemas.microsoft.com/office/drawing/2014/main" id="{668CB5E1-BBE1-FA97-3441-B73C99A53872}"/>
+                </a:ext>
+              </a:extLst>
+            </p:cNvPr>
+            <p:cNvSpPr/>
+            <p:nvPr/>
+          </p:nvSpPr>
+          <p:spPr>
+            <a:xfrm>
+              <a:off x="8578585" y="5348988"/>
+              <a:ext cx="225666" cy="45719"/>
+            </a:xfrm>
+            <a:prstGeom prst="rect">
+              <a:avLst/>
+            </a:prstGeom>
+            <a:noFill/>
+            <a:ln w="9525">
+              <a:solidFill>
+                <a:schemeClr val="tx1"/>
+              </a:solidFill>
+            </a:ln>
+          </p:spPr>
+          <p:style>
+            <a:lnRef idx="2">
+              <a:schemeClr val="accent1">
+                <a:shade val="15000"/>
+              </a:schemeClr>
+            </a:lnRef>
+            <a:fillRef idx="1">
+              <a:schemeClr val="accent1"/>
+            </a:fillRef>
+            <a:effectRef idx="0">
+              <a:schemeClr val="accent1"/>
+            </a:effectRef>
+            <a:fontRef idx="minor">
+              <a:schemeClr val="lt1"/>
+            </a:fontRef>
+          </p:style>
+          <p:txBody>
+            <a:bodyPr rtlCol="0" anchor="ctr"/>
+            <a:lstStyle/>
+            <a:p>
+              <a:pPr algn="ctr"/>
+              <a:endParaRPr lang="ko-KR" altLang="en-US" sz="1000">
+                <a:solidFill>
+                  <a:schemeClr val="tx1"/>
+                </a:solidFill>
+                <a:latin typeface="바탕체" panose="02030609000101010101" pitchFamily="17" charset="-127"/>
+                <a:ea typeface="바탕체" panose="02030609000101010101" pitchFamily="17" charset="-127"/>
+              </a:endParaRPr>
+            </a:p>
+          </p:txBody>
+        </p:sp>
+        <p:sp>
+          <p:nvSpPr>
+            <p:cNvPr id="34" name="직사각형 33">
+              <a:extLst>
+                <a:ext uri="{FF2B5EF4-FFF2-40B4-BE49-F238E27FC236}">
+                  <a16:creationId xmlns:a16="http://schemas.microsoft.com/office/drawing/2014/main" id="{C2568BCB-B092-FC0F-B626-2C605F4DEC5B}"/>
+                </a:ext>
+              </a:extLst>
+            </p:cNvPr>
+            <p:cNvSpPr/>
+            <p:nvPr/>
+          </p:nvSpPr>
+          <p:spPr>
+            <a:xfrm>
+              <a:off x="7640563" y="5348988"/>
+              <a:ext cx="225666" cy="45719"/>
+            </a:xfrm>
+            <a:prstGeom prst="rect">
+              <a:avLst/>
+            </a:prstGeom>
+            <a:noFill/>
+            <a:ln w="9525">
+              <a:solidFill>
+                <a:schemeClr val="tx1"/>
+              </a:solidFill>
+            </a:ln>
+          </p:spPr>
+          <p:style>
+            <a:lnRef idx="2">
+              <a:schemeClr val="accent1">
+                <a:shade val="15000"/>
+              </a:schemeClr>
+            </a:lnRef>
+            <a:fillRef idx="1">
+              <a:schemeClr val="accent1"/>
+            </a:fillRef>
+            <a:effectRef idx="0">
+              <a:schemeClr val="accent1"/>
+            </a:effectRef>
+            <a:fontRef idx="minor">
+              <a:schemeClr val="lt1"/>
+            </a:fontRef>
+          </p:style>
+          <p:txBody>
+            <a:bodyPr rtlCol="0" anchor="ctr"/>
+            <a:lstStyle/>
+            <a:p>
+              <a:pPr algn="ctr"/>
+              <a:endParaRPr lang="ko-KR" altLang="en-US" sz="1000">
+                <a:solidFill>
+                  <a:schemeClr val="tx1"/>
+                </a:solidFill>
+                <a:latin typeface="바탕체" panose="02030609000101010101" pitchFamily="17" charset="-127"/>
+                <a:ea typeface="바탕체" panose="02030609000101010101" pitchFamily="17" charset="-127"/>
+              </a:endParaRPr>
+            </a:p>
+          </p:txBody>
+        </p:sp>
+        <p:sp>
+          <p:nvSpPr>
+            <p:cNvPr id="36" name="직사각형 35">
+              <a:extLst>
+                <a:ext uri="{FF2B5EF4-FFF2-40B4-BE49-F238E27FC236}">
+                  <a16:creationId xmlns:a16="http://schemas.microsoft.com/office/drawing/2014/main" id="{AABAAB0E-DE40-5CD2-2E48-D6DD61275DB7}"/>
+                </a:ext>
+              </a:extLst>
+            </p:cNvPr>
+            <p:cNvSpPr/>
+            <p:nvPr/>
+          </p:nvSpPr>
+          <p:spPr>
+            <a:xfrm>
+              <a:off x="6810769" y="5348988"/>
+              <a:ext cx="225666" cy="45719"/>
+            </a:xfrm>
+            <a:prstGeom prst="rect">
+              <a:avLst/>
+            </a:prstGeom>
+            <a:noFill/>
+            <a:ln w="9525">
+              <a:solidFill>
+                <a:schemeClr val="tx1"/>
+              </a:solidFill>
+            </a:ln>
+          </p:spPr>
+          <p:style>
+            <a:lnRef idx="2">
+              <a:schemeClr val="accent1">
+                <a:shade val="15000"/>
+              </a:schemeClr>
+            </a:lnRef>
+            <a:fillRef idx="1">
+              <a:schemeClr val="accent1"/>
+            </a:fillRef>
+            <a:effectRef idx="0">
+              <a:schemeClr val="accent1"/>
+            </a:effectRef>
+            <a:fontRef idx="minor">
+              <a:schemeClr val="lt1"/>
+            </a:fontRef>
+          </p:style>
+          <p:txBody>
+            <a:bodyPr rtlCol="0" anchor="ctr"/>
+            <a:lstStyle/>
+            <a:p>
+              <a:pPr algn="ctr"/>
+              <a:endParaRPr lang="ko-KR" altLang="en-US" sz="1000">
+                <a:solidFill>
+                  <a:schemeClr val="tx1"/>
+                </a:solidFill>
+                <a:latin typeface="바탕체" panose="02030609000101010101" pitchFamily="17" charset="-127"/>
+                <a:ea typeface="바탕체" panose="02030609000101010101" pitchFamily="17" charset="-127"/>
+              </a:endParaRPr>
+            </a:p>
+          </p:txBody>
+        </p:sp>
+        <p:sp>
+          <p:nvSpPr>
+            <p:cNvPr id="38" name="직사각형 37">
+              <a:extLst>
+                <a:ext uri="{FF2B5EF4-FFF2-40B4-BE49-F238E27FC236}">
+                  <a16:creationId xmlns:a16="http://schemas.microsoft.com/office/drawing/2014/main" id="{18071F1C-2B1F-D181-BA80-2C3D6F654443}"/>
+                </a:ext>
+              </a:extLst>
+            </p:cNvPr>
+            <p:cNvSpPr/>
+            <p:nvPr/>
+          </p:nvSpPr>
+          <p:spPr>
+            <a:xfrm>
+              <a:off x="7226989" y="5348988"/>
+              <a:ext cx="225666" cy="45719"/>
+            </a:xfrm>
+            <a:prstGeom prst="rect">
+              <a:avLst/>
+            </a:prstGeom>
+            <a:noFill/>
+            <a:ln w="9525">
+              <a:solidFill>
+                <a:schemeClr val="tx1"/>
+              </a:solidFill>
+            </a:ln>
+          </p:spPr>
+          <p:style>
+            <a:lnRef idx="2">
+              <a:schemeClr val="accent1">
+                <a:shade val="15000"/>
+              </a:schemeClr>
+            </a:lnRef>
+            <a:fillRef idx="1">
+              <a:schemeClr val="accent1"/>
+            </a:fillRef>
+            <a:effectRef idx="0">
+              <a:schemeClr val="accent1"/>
+            </a:effectRef>
+            <a:fontRef idx="minor">
+              <a:schemeClr val="lt1"/>
+            </a:fontRef>
+          </p:style>
+          <p:txBody>
+            <a:bodyPr rtlCol="0" anchor="ctr"/>
+            <a:lstStyle/>
+            <a:p>
+              <a:pPr algn="ctr"/>
+              <a:endParaRPr lang="ko-KR" altLang="en-US" sz="1000">
+                <a:solidFill>
+                  <a:schemeClr val="tx1"/>
+                </a:solidFill>
+                <a:latin typeface="바탕체" panose="02030609000101010101" pitchFamily="17" charset="-127"/>
+                <a:ea typeface="바탕체" panose="02030609000101010101" pitchFamily="17" charset="-127"/>
+              </a:endParaRPr>
+            </a:p>
+          </p:txBody>
+        </p:sp>
+      </p:grpSp>
+      <p:grpSp>
+        <p:nvGrpSpPr>
           <p:cNvPr id="2" name="그룹 1">
             <a:extLst>
               <a:ext uri="{FF2B5EF4-FFF2-40B4-BE49-F238E27FC236}">
@@ -19917,9 +20229,9 @@
         <p:grpSpPr>
           <a:xfrm flipH="1">
             <a:off x="1353033" y="2701637"/>
-            <a:ext cx="9428843" cy="3708399"/>
-            <a:chOff x="1400345" y="2701637"/>
-            <a:chExt cx="9402345" cy="3708399"/>
+            <a:ext cx="9428842" cy="3708399"/>
+            <a:chOff x="1400346" y="2701637"/>
+            <a:chExt cx="9402344" cy="3708399"/>
           </a:xfrm>
         </p:grpSpPr>
         <p:sp>
@@ -19943,66 +20255,6 @@
               <a:avLst/>
             </a:prstGeom>
             <a:noFill/>
-            <a:ln>
-              <a:solidFill>
-                <a:schemeClr val="tx1"/>
-              </a:solidFill>
-            </a:ln>
-          </p:spPr>
-          <p:style>
-            <a:lnRef idx="2">
-              <a:schemeClr val="accent1">
-                <a:shade val="15000"/>
-              </a:schemeClr>
-            </a:lnRef>
-            <a:fillRef idx="1">
-              <a:schemeClr val="accent1"/>
-            </a:fillRef>
-            <a:effectRef idx="0">
-              <a:schemeClr val="accent1"/>
-            </a:effectRef>
-            <a:fontRef idx="minor">
-              <a:schemeClr val="lt1"/>
-            </a:fontRef>
-          </p:style>
-          <p:txBody>
-            <a:bodyPr rtlCol="0" anchor="ctr"/>
-            <a:lstStyle/>
-            <a:p>
-              <a:pPr algn="ctr"/>
-              <a:endParaRPr lang="ko-KR" altLang="en-US" sz="1000">
-                <a:solidFill>
-                  <a:schemeClr val="tx1"/>
-                </a:solidFill>
-                <a:latin typeface="바탕체" panose="02030609000101010101" pitchFamily="17" charset="-127"/>
-                <a:ea typeface="바탕체" panose="02030609000101010101" pitchFamily="17" charset="-127"/>
-              </a:endParaRPr>
-            </a:p>
-          </p:txBody>
-        </p:sp>
-        <p:sp>
-          <p:nvSpPr>
-            <p:cNvPr id="4" name="직사각형 3">
-              <a:extLst>
-                <a:ext uri="{FF2B5EF4-FFF2-40B4-BE49-F238E27FC236}">
-                  <a16:creationId xmlns:a16="http://schemas.microsoft.com/office/drawing/2014/main" id="{538B3527-E7F3-1624-E953-F2D11F3EDBA9}"/>
-                </a:ext>
-              </a:extLst>
-            </p:cNvPr>
-            <p:cNvSpPr/>
-            <p:nvPr/>
-          </p:nvSpPr>
-          <p:spPr>
-            <a:xfrm>
-              <a:off x="1400345" y="5538930"/>
-              <a:ext cx="9337964" cy="871106"/>
-            </a:xfrm>
-            <a:prstGeom prst="rect">
-              <a:avLst/>
-            </a:prstGeom>
-            <a:solidFill>
-              <a:schemeClr val="bg1"/>
-            </a:solidFill>
             <a:ln>
               <a:solidFill>
                 <a:schemeClr val="tx1"/>
@@ -20100,6 +20352,66 @@
             </a:p>
           </p:txBody>
         </p:sp>
+        <p:sp>
+          <p:nvSpPr>
+            <p:cNvPr id="4" name="직사각형 3">
+              <a:extLst>
+                <a:ext uri="{FF2B5EF4-FFF2-40B4-BE49-F238E27FC236}">
+                  <a16:creationId xmlns:a16="http://schemas.microsoft.com/office/drawing/2014/main" id="{538B3527-E7F3-1624-E953-F2D11F3EDBA9}"/>
+                </a:ext>
+              </a:extLst>
+            </p:cNvPr>
+            <p:cNvSpPr/>
+            <p:nvPr/>
+          </p:nvSpPr>
+          <p:spPr>
+            <a:xfrm>
+              <a:off x="1400346" y="5184742"/>
+              <a:ext cx="9337964" cy="1225294"/>
+            </a:xfrm>
+            <a:prstGeom prst="rect">
+              <a:avLst/>
+            </a:prstGeom>
+            <a:solidFill>
+              <a:schemeClr val="bg1"/>
+            </a:solidFill>
+            <a:ln>
+              <a:solidFill>
+                <a:schemeClr val="tx1"/>
+              </a:solidFill>
+            </a:ln>
+          </p:spPr>
+          <p:style>
+            <a:lnRef idx="2">
+              <a:schemeClr val="accent1">
+                <a:shade val="15000"/>
+              </a:schemeClr>
+            </a:lnRef>
+            <a:fillRef idx="1">
+              <a:schemeClr val="accent1"/>
+            </a:fillRef>
+            <a:effectRef idx="0">
+              <a:schemeClr val="accent1"/>
+            </a:effectRef>
+            <a:fontRef idx="minor">
+              <a:schemeClr val="lt1"/>
+            </a:fontRef>
+          </p:style>
+          <p:txBody>
+            <a:bodyPr rtlCol="0" anchor="ctr"/>
+            <a:lstStyle/>
+            <a:p>
+              <a:pPr algn="ctr"/>
+              <a:endParaRPr lang="ko-KR" altLang="en-US" sz="1000">
+                <a:solidFill>
+                  <a:schemeClr val="tx1"/>
+                </a:solidFill>
+                <a:latin typeface="바탕체" panose="02030609000101010101" pitchFamily="17" charset="-127"/>
+                <a:ea typeface="바탕체" panose="02030609000101010101" pitchFamily="17" charset="-127"/>
+              </a:endParaRPr>
+            </a:p>
+          </p:txBody>
+        </p:sp>
       </p:grpSp>
       <p:sp>
         <p:nvSpPr>
@@ -20136,317 +20448,6 @@
           </a:p>
         </p:txBody>
       </p:sp>
-      <p:grpSp>
-        <p:nvGrpSpPr>
-          <p:cNvPr id="39" name="그룹 38">
-            <a:extLst>
-              <a:ext uri="{FF2B5EF4-FFF2-40B4-BE49-F238E27FC236}">
-                <a16:creationId xmlns:a16="http://schemas.microsoft.com/office/drawing/2014/main" id="{DA9D126F-F716-0CAE-97DB-20FECCF71673}"/>
-              </a:ext>
-            </a:extLst>
-          </p:cNvPr>
-          <p:cNvGrpSpPr/>
-          <p:nvPr/>
-        </p:nvGrpSpPr>
-        <p:grpSpPr>
-          <a:xfrm>
-            <a:off x="3488272" y="4952747"/>
-            <a:ext cx="1993482" cy="586182"/>
-            <a:chOff x="6810769" y="5348988"/>
-            <a:chExt cx="1993482" cy="45719"/>
-          </a:xfrm>
-        </p:grpSpPr>
-        <p:sp>
-          <p:nvSpPr>
-            <p:cNvPr id="30" name="직사각형 29">
-              <a:extLst>
-                <a:ext uri="{FF2B5EF4-FFF2-40B4-BE49-F238E27FC236}">
-                  <a16:creationId xmlns:a16="http://schemas.microsoft.com/office/drawing/2014/main" id="{2BCBE302-7743-F483-0D9B-092A5F8F1EAD}"/>
-                </a:ext>
-              </a:extLst>
-            </p:cNvPr>
-            <p:cNvSpPr/>
-            <p:nvPr/>
-          </p:nvSpPr>
-          <p:spPr>
-            <a:xfrm>
-              <a:off x="8149779" y="5348988"/>
-              <a:ext cx="225666" cy="45719"/>
-            </a:xfrm>
-            <a:prstGeom prst="rect">
-              <a:avLst/>
-            </a:prstGeom>
-            <a:noFill/>
-            <a:ln w="9525">
-              <a:solidFill>
-                <a:schemeClr val="tx1"/>
-              </a:solidFill>
-            </a:ln>
-          </p:spPr>
-          <p:style>
-            <a:lnRef idx="2">
-              <a:schemeClr val="accent1">
-                <a:shade val="15000"/>
-              </a:schemeClr>
-            </a:lnRef>
-            <a:fillRef idx="1">
-              <a:schemeClr val="accent1"/>
-            </a:fillRef>
-            <a:effectRef idx="0">
-              <a:schemeClr val="accent1"/>
-            </a:effectRef>
-            <a:fontRef idx="minor">
-              <a:schemeClr val="lt1"/>
-            </a:fontRef>
-          </p:style>
-          <p:txBody>
-            <a:bodyPr rtlCol="0" anchor="ctr"/>
-            <a:lstStyle/>
-            <a:p>
-              <a:pPr algn="ctr"/>
-              <a:endParaRPr lang="ko-KR" altLang="en-US" sz="1000">
-                <a:solidFill>
-                  <a:schemeClr val="tx1"/>
-                </a:solidFill>
-                <a:latin typeface="바탕체" panose="02030609000101010101" pitchFamily="17" charset="-127"/>
-                <a:ea typeface="바탕체" panose="02030609000101010101" pitchFamily="17" charset="-127"/>
-              </a:endParaRPr>
-            </a:p>
-          </p:txBody>
-        </p:sp>
-        <p:sp>
-          <p:nvSpPr>
-            <p:cNvPr id="32" name="직사각형 31">
-              <a:extLst>
-                <a:ext uri="{FF2B5EF4-FFF2-40B4-BE49-F238E27FC236}">
-                  <a16:creationId xmlns:a16="http://schemas.microsoft.com/office/drawing/2014/main" id="{668CB5E1-BBE1-FA97-3441-B73C99A53872}"/>
-                </a:ext>
-              </a:extLst>
-            </p:cNvPr>
-            <p:cNvSpPr/>
-            <p:nvPr/>
-          </p:nvSpPr>
-          <p:spPr>
-            <a:xfrm>
-              <a:off x="8578585" y="5348988"/>
-              <a:ext cx="225666" cy="45719"/>
-            </a:xfrm>
-            <a:prstGeom prst="rect">
-              <a:avLst/>
-            </a:prstGeom>
-            <a:noFill/>
-            <a:ln w="9525">
-              <a:solidFill>
-                <a:schemeClr val="tx1"/>
-              </a:solidFill>
-            </a:ln>
-          </p:spPr>
-          <p:style>
-            <a:lnRef idx="2">
-              <a:schemeClr val="accent1">
-                <a:shade val="15000"/>
-              </a:schemeClr>
-            </a:lnRef>
-            <a:fillRef idx="1">
-              <a:schemeClr val="accent1"/>
-            </a:fillRef>
-            <a:effectRef idx="0">
-              <a:schemeClr val="accent1"/>
-            </a:effectRef>
-            <a:fontRef idx="minor">
-              <a:schemeClr val="lt1"/>
-            </a:fontRef>
-          </p:style>
-          <p:txBody>
-            <a:bodyPr rtlCol="0" anchor="ctr"/>
-            <a:lstStyle/>
-            <a:p>
-              <a:pPr algn="ctr"/>
-              <a:endParaRPr lang="ko-KR" altLang="en-US" sz="1000">
-                <a:solidFill>
-                  <a:schemeClr val="tx1"/>
-                </a:solidFill>
-                <a:latin typeface="바탕체" panose="02030609000101010101" pitchFamily="17" charset="-127"/>
-                <a:ea typeface="바탕체" panose="02030609000101010101" pitchFamily="17" charset="-127"/>
-              </a:endParaRPr>
-            </a:p>
-          </p:txBody>
-        </p:sp>
-        <p:sp>
-          <p:nvSpPr>
-            <p:cNvPr id="34" name="직사각형 33">
-              <a:extLst>
-                <a:ext uri="{FF2B5EF4-FFF2-40B4-BE49-F238E27FC236}">
-                  <a16:creationId xmlns:a16="http://schemas.microsoft.com/office/drawing/2014/main" id="{C2568BCB-B092-FC0F-B626-2C605F4DEC5B}"/>
-                </a:ext>
-              </a:extLst>
-            </p:cNvPr>
-            <p:cNvSpPr/>
-            <p:nvPr/>
-          </p:nvSpPr>
-          <p:spPr>
-            <a:xfrm>
-              <a:off x="7640563" y="5348988"/>
-              <a:ext cx="225666" cy="45719"/>
-            </a:xfrm>
-            <a:prstGeom prst="rect">
-              <a:avLst/>
-            </a:prstGeom>
-            <a:noFill/>
-            <a:ln w="9525">
-              <a:solidFill>
-                <a:schemeClr val="tx1"/>
-              </a:solidFill>
-            </a:ln>
-          </p:spPr>
-          <p:style>
-            <a:lnRef idx="2">
-              <a:schemeClr val="accent1">
-                <a:shade val="15000"/>
-              </a:schemeClr>
-            </a:lnRef>
-            <a:fillRef idx="1">
-              <a:schemeClr val="accent1"/>
-            </a:fillRef>
-            <a:effectRef idx="0">
-              <a:schemeClr val="accent1"/>
-            </a:effectRef>
-            <a:fontRef idx="minor">
-              <a:schemeClr val="lt1"/>
-            </a:fontRef>
-          </p:style>
-          <p:txBody>
-            <a:bodyPr rtlCol="0" anchor="ctr"/>
-            <a:lstStyle/>
-            <a:p>
-              <a:pPr algn="ctr"/>
-              <a:endParaRPr lang="ko-KR" altLang="en-US" sz="1000">
-                <a:solidFill>
-                  <a:schemeClr val="tx1"/>
-                </a:solidFill>
-                <a:latin typeface="바탕체" panose="02030609000101010101" pitchFamily="17" charset="-127"/>
-                <a:ea typeface="바탕체" panose="02030609000101010101" pitchFamily="17" charset="-127"/>
-              </a:endParaRPr>
-            </a:p>
-          </p:txBody>
-        </p:sp>
-        <p:sp>
-          <p:nvSpPr>
-            <p:cNvPr id="36" name="직사각형 35">
-              <a:extLst>
-                <a:ext uri="{FF2B5EF4-FFF2-40B4-BE49-F238E27FC236}">
-                  <a16:creationId xmlns:a16="http://schemas.microsoft.com/office/drawing/2014/main" id="{AABAAB0E-DE40-5CD2-2E48-D6DD61275DB7}"/>
-                </a:ext>
-              </a:extLst>
-            </p:cNvPr>
-            <p:cNvSpPr/>
-            <p:nvPr/>
-          </p:nvSpPr>
-          <p:spPr>
-            <a:xfrm>
-              <a:off x="6810769" y="5348988"/>
-              <a:ext cx="225666" cy="45719"/>
-            </a:xfrm>
-            <a:prstGeom prst="rect">
-              <a:avLst/>
-            </a:prstGeom>
-            <a:noFill/>
-            <a:ln w="9525">
-              <a:solidFill>
-                <a:schemeClr val="tx1"/>
-              </a:solidFill>
-            </a:ln>
-          </p:spPr>
-          <p:style>
-            <a:lnRef idx="2">
-              <a:schemeClr val="accent1">
-                <a:shade val="15000"/>
-              </a:schemeClr>
-            </a:lnRef>
-            <a:fillRef idx="1">
-              <a:schemeClr val="accent1"/>
-            </a:fillRef>
-            <a:effectRef idx="0">
-              <a:schemeClr val="accent1"/>
-            </a:effectRef>
-            <a:fontRef idx="minor">
-              <a:schemeClr val="lt1"/>
-            </a:fontRef>
-          </p:style>
-          <p:txBody>
-            <a:bodyPr rtlCol="0" anchor="ctr"/>
-            <a:lstStyle/>
-            <a:p>
-              <a:pPr algn="ctr"/>
-              <a:endParaRPr lang="ko-KR" altLang="en-US" sz="1000">
-                <a:solidFill>
-                  <a:schemeClr val="tx1"/>
-                </a:solidFill>
-                <a:latin typeface="바탕체" panose="02030609000101010101" pitchFamily="17" charset="-127"/>
-                <a:ea typeface="바탕체" panose="02030609000101010101" pitchFamily="17" charset="-127"/>
-              </a:endParaRPr>
-            </a:p>
-          </p:txBody>
-        </p:sp>
-        <p:sp>
-          <p:nvSpPr>
-            <p:cNvPr id="38" name="직사각형 37">
-              <a:extLst>
-                <a:ext uri="{FF2B5EF4-FFF2-40B4-BE49-F238E27FC236}">
-                  <a16:creationId xmlns:a16="http://schemas.microsoft.com/office/drawing/2014/main" id="{18071F1C-2B1F-D181-BA80-2C3D6F654443}"/>
-                </a:ext>
-              </a:extLst>
-            </p:cNvPr>
-            <p:cNvSpPr/>
-            <p:nvPr/>
-          </p:nvSpPr>
-          <p:spPr>
-            <a:xfrm>
-              <a:off x="7226989" y="5348988"/>
-              <a:ext cx="225666" cy="45719"/>
-            </a:xfrm>
-            <a:prstGeom prst="rect">
-              <a:avLst/>
-            </a:prstGeom>
-            <a:noFill/>
-            <a:ln w="9525">
-              <a:solidFill>
-                <a:schemeClr val="tx1"/>
-              </a:solidFill>
-            </a:ln>
-          </p:spPr>
-          <p:style>
-            <a:lnRef idx="2">
-              <a:schemeClr val="accent1">
-                <a:shade val="15000"/>
-              </a:schemeClr>
-            </a:lnRef>
-            <a:fillRef idx="1">
-              <a:schemeClr val="accent1"/>
-            </a:fillRef>
-            <a:effectRef idx="0">
-              <a:schemeClr val="accent1"/>
-            </a:effectRef>
-            <a:fontRef idx="minor">
-              <a:schemeClr val="lt1"/>
-            </a:fontRef>
-          </p:style>
-          <p:txBody>
-            <a:bodyPr rtlCol="0" anchor="ctr"/>
-            <a:lstStyle/>
-            <a:p>
-              <a:pPr algn="ctr"/>
-              <a:endParaRPr lang="ko-KR" altLang="en-US" sz="1000">
-                <a:solidFill>
-                  <a:schemeClr val="tx1"/>
-                </a:solidFill>
-                <a:latin typeface="바탕체" panose="02030609000101010101" pitchFamily="17" charset="-127"/>
-                <a:ea typeface="바탕체" panose="02030609000101010101" pitchFamily="17" charset="-127"/>
-              </a:endParaRPr>
-            </a:p>
-          </p:txBody>
-        </p:sp>
-      </p:grpSp>
       <p:grpSp>
         <p:nvGrpSpPr>
           <p:cNvPr id="76" name="그룹 75">
@@ -21106,6 +21107,64 @@
           </p:txBody>
         </p:sp>
       </p:grpSp>
+      <p:sp>
+        <p:nvSpPr>
+          <p:cNvPr id="83" name="직사각형 82">
+            <a:extLst>
+              <a:ext uri="{FF2B5EF4-FFF2-40B4-BE49-F238E27FC236}">
+                <a16:creationId xmlns:a16="http://schemas.microsoft.com/office/drawing/2014/main" id="{E71D461A-2851-C775-C77D-148701456D86}"/>
+              </a:ext>
+            </a:extLst>
+          </p:cNvPr>
+          <p:cNvSpPr/>
+          <p:nvPr/>
+        </p:nvSpPr>
+        <p:spPr>
+          <a:xfrm>
+            <a:off x="3250274" y="2428259"/>
+            <a:ext cx="6175853" cy="273377"/>
+          </a:xfrm>
+          <a:prstGeom prst="rect">
+            <a:avLst/>
+          </a:prstGeom>
+          <a:noFill/>
+          <a:ln>
+            <a:solidFill>
+              <a:schemeClr val="tx1"/>
+            </a:solidFill>
+          </a:ln>
+        </p:spPr>
+        <p:style>
+          <a:lnRef idx="2">
+            <a:schemeClr val="accent1">
+              <a:shade val="15000"/>
+            </a:schemeClr>
+          </a:lnRef>
+          <a:fillRef idx="1">
+            <a:schemeClr val="accent1"/>
+          </a:fillRef>
+          <a:effectRef idx="0">
+            <a:schemeClr val="accent1"/>
+          </a:effectRef>
+          <a:fontRef idx="minor">
+            <a:schemeClr val="lt1"/>
+          </a:fontRef>
+        </p:style>
+        <p:txBody>
+          <a:bodyPr rtlCol="0" anchor="ctr"/>
+          <a:lstStyle/>
+          <a:p>
+            <a:pPr algn="ctr"/>
+            <a:endParaRPr lang="ko-KR" altLang="en-US" sz="1000">
+              <a:solidFill>
+                <a:schemeClr val="tx1"/>
+              </a:solidFill>
+              <a:latin typeface="바탕체" panose="02030609000101010101" pitchFamily="17" charset="-127"/>
+              <a:ea typeface="바탕체" panose="02030609000101010101" pitchFamily="17" charset="-127"/>
+            </a:endParaRPr>
+          </a:p>
+        </p:txBody>
+      </p:sp>
     </p:spTree>
     <p:extLst>
       <p:ext uri="{BB962C8B-B14F-4D97-AF65-F5344CB8AC3E}">
@@ -21146,6 +21205,1900 @@
     <p:extLst>
       <p:ext uri="{BB962C8B-B14F-4D97-AF65-F5344CB8AC3E}">
         <p14:creationId xmlns:p14="http://schemas.microsoft.com/office/powerpoint/2010/main" val="1790719718"/>
+      </p:ext>
+    </p:extLst>
+  </p:cSld>
+  <p:clrMapOvr>
+    <a:masterClrMapping/>
+  </p:clrMapOvr>
+</p:sld>
+</file>
+
+<file path=ppt/slides/slide7.xml><?xml version="1.0" encoding="utf-8"?>
+<p:sld xmlns:a="http://schemas.openxmlformats.org/drawingml/2006/main" xmlns:r="http://schemas.openxmlformats.org/officeDocument/2006/relationships" xmlns:p="http://schemas.openxmlformats.org/presentationml/2006/main">
+  <p:cSld>
+    <p:spTree>
+      <p:nvGrpSpPr>
+        <p:cNvPr id="1" name="">
+          <a:extLst>
+            <a:ext uri="{FF2B5EF4-FFF2-40B4-BE49-F238E27FC236}">
+              <a16:creationId xmlns:a16="http://schemas.microsoft.com/office/drawing/2014/main" id="{C6B59CA4-2303-71A4-AB24-D484AD583017}"/>
+            </a:ext>
+          </a:extLst>
+        </p:cNvPr>
+        <p:cNvGrpSpPr/>
+        <p:nvPr/>
+      </p:nvGrpSpPr>
+      <p:grpSpPr>
+        <a:xfrm>
+          <a:off x="0" y="0"/>
+          <a:ext cx="0" cy="0"/>
+          <a:chOff x="0" y="0"/>
+          <a:chExt cx="0" cy="0"/>
+        </a:xfrm>
+      </p:grpSpPr>
+      <p:sp>
+        <p:nvSpPr>
+          <p:cNvPr id="4" name="직사각형 3">
+            <a:extLst>
+              <a:ext uri="{FF2B5EF4-FFF2-40B4-BE49-F238E27FC236}">
+                <a16:creationId xmlns:a16="http://schemas.microsoft.com/office/drawing/2014/main" id="{5A2DE957-3229-A238-7BED-13A433B20E54}"/>
+              </a:ext>
+            </a:extLst>
+          </p:cNvPr>
+          <p:cNvSpPr/>
+          <p:nvPr/>
+        </p:nvSpPr>
+        <p:spPr>
+          <a:xfrm>
+            <a:off x="1427018" y="554182"/>
+            <a:ext cx="9337964" cy="5855854"/>
+          </a:xfrm>
+          <a:prstGeom prst="rect">
+            <a:avLst/>
+          </a:prstGeom>
+          <a:noFill/>
+          <a:ln>
+            <a:solidFill>
+              <a:schemeClr val="tx1"/>
+            </a:solidFill>
+          </a:ln>
+        </p:spPr>
+        <p:style>
+          <a:lnRef idx="2">
+            <a:schemeClr val="accent1">
+              <a:shade val="15000"/>
+            </a:schemeClr>
+          </a:lnRef>
+          <a:fillRef idx="1">
+            <a:schemeClr val="accent1"/>
+          </a:fillRef>
+          <a:effectRef idx="0">
+            <a:schemeClr val="accent1"/>
+          </a:effectRef>
+          <a:fontRef idx="minor">
+            <a:schemeClr val="lt1"/>
+          </a:fontRef>
+        </p:style>
+        <p:txBody>
+          <a:bodyPr rtlCol="0" anchor="ctr"/>
+          <a:lstStyle/>
+          <a:p>
+            <a:pPr algn="ctr"/>
+            <a:endParaRPr lang="ko-KR" altLang="en-US" sz="1000">
+              <a:solidFill>
+                <a:schemeClr val="tx1"/>
+              </a:solidFill>
+              <a:latin typeface="바탕체" panose="02030609000101010101" pitchFamily="17" charset="-127"/>
+              <a:ea typeface="바탕체" panose="02030609000101010101" pitchFamily="17" charset="-127"/>
+            </a:endParaRPr>
+          </a:p>
+        </p:txBody>
+      </p:sp>
+      <p:sp>
+        <p:nvSpPr>
+          <p:cNvPr id="6" name="직사각형 5">
+            <a:extLst>
+              <a:ext uri="{FF2B5EF4-FFF2-40B4-BE49-F238E27FC236}">
+                <a16:creationId xmlns:a16="http://schemas.microsoft.com/office/drawing/2014/main" id="{96CF4D14-1EFB-FDA5-CEEA-623F5598D365}"/>
+              </a:ext>
+            </a:extLst>
+          </p:cNvPr>
+          <p:cNvSpPr/>
+          <p:nvPr/>
+        </p:nvSpPr>
+        <p:spPr>
+          <a:xfrm>
+            <a:off x="2757055" y="1319070"/>
+            <a:ext cx="6153726" cy="3708398"/>
+          </a:xfrm>
+          <a:prstGeom prst="rect">
+            <a:avLst/>
+          </a:prstGeom>
+          <a:noFill/>
+          <a:ln>
+            <a:solidFill>
+              <a:schemeClr val="tx1"/>
+            </a:solidFill>
+          </a:ln>
+        </p:spPr>
+        <p:style>
+          <a:lnRef idx="2">
+            <a:schemeClr val="accent1">
+              <a:shade val="15000"/>
+            </a:schemeClr>
+          </a:lnRef>
+          <a:fillRef idx="1">
+            <a:schemeClr val="accent1"/>
+          </a:fillRef>
+          <a:effectRef idx="0">
+            <a:schemeClr val="accent1"/>
+          </a:effectRef>
+          <a:fontRef idx="minor">
+            <a:schemeClr val="lt1"/>
+          </a:fontRef>
+        </p:style>
+        <p:txBody>
+          <a:bodyPr rtlCol="0" anchor="ctr"/>
+          <a:lstStyle/>
+          <a:p>
+            <a:pPr algn="ctr"/>
+            <a:endParaRPr lang="ko-KR" altLang="en-US" sz="1000">
+              <a:solidFill>
+                <a:schemeClr val="tx1"/>
+              </a:solidFill>
+              <a:latin typeface="바탕체" panose="02030609000101010101" pitchFamily="17" charset="-127"/>
+              <a:ea typeface="바탕체" panose="02030609000101010101" pitchFamily="17" charset="-127"/>
+            </a:endParaRPr>
+          </a:p>
+        </p:txBody>
+      </p:sp>
+      <p:sp>
+        <p:nvSpPr>
+          <p:cNvPr id="8" name="직사각형 7">
+            <a:extLst>
+              <a:ext uri="{FF2B5EF4-FFF2-40B4-BE49-F238E27FC236}">
+                <a16:creationId xmlns:a16="http://schemas.microsoft.com/office/drawing/2014/main" id="{3659F59D-FC91-FA8E-2BB9-F11D288CA51B}"/>
+              </a:ext>
+            </a:extLst>
+          </p:cNvPr>
+          <p:cNvSpPr/>
+          <p:nvPr/>
+        </p:nvSpPr>
+        <p:spPr>
+          <a:xfrm>
+            <a:off x="1493982" y="1523584"/>
+            <a:ext cx="588819" cy="1164198"/>
+          </a:xfrm>
+          <a:prstGeom prst="rect">
+            <a:avLst/>
+          </a:prstGeom>
+          <a:noFill/>
+          <a:ln w="9525">
+            <a:solidFill>
+              <a:schemeClr val="tx1">
+                <a:alpha val="50000"/>
+              </a:schemeClr>
+            </a:solidFill>
+          </a:ln>
+        </p:spPr>
+        <p:style>
+          <a:lnRef idx="2">
+            <a:schemeClr val="accent1">
+              <a:shade val="15000"/>
+            </a:schemeClr>
+          </a:lnRef>
+          <a:fillRef idx="1">
+            <a:schemeClr val="accent1"/>
+          </a:fillRef>
+          <a:effectRef idx="0">
+            <a:schemeClr val="accent1"/>
+          </a:effectRef>
+          <a:fontRef idx="minor">
+            <a:schemeClr val="lt1"/>
+          </a:fontRef>
+        </p:style>
+        <p:txBody>
+          <a:bodyPr rtlCol="0" anchor="ctr"/>
+          <a:lstStyle/>
+          <a:p>
+            <a:pPr algn="ctr"/>
+            <a:r>
+              <a:rPr lang="ko-KR" altLang="en-US" sz="1000" dirty="0">
+                <a:solidFill>
+                  <a:schemeClr val="bg2">
+                    <a:lumMod val="50000"/>
+                  </a:schemeClr>
+                </a:solidFill>
+                <a:latin typeface="바탕체" panose="02030609000101010101" pitchFamily="17" charset="-127"/>
+                <a:ea typeface="바탕체" panose="02030609000101010101" pitchFamily="17" charset="-127"/>
+              </a:rPr>
+              <a:t>흡연</a:t>
+            </a:r>
+            <a:endParaRPr lang="en-US" altLang="ko-KR" sz="1000" dirty="0">
+              <a:solidFill>
+                <a:schemeClr val="bg2">
+                  <a:lumMod val="50000"/>
+                </a:schemeClr>
+              </a:solidFill>
+              <a:latin typeface="바탕체" panose="02030609000101010101" pitchFamily="17" charset="-127"/>
+              <a:ea typeface="바탕체" panose="02030609000101010101" pitchFamily="17" charset="-127"/>
+            </a:endParaRPr>
+          </a:p>
+          <a:p>
+            <a:pPr algn="ctr"/>
+            <a:r>
+              <a:rPr lang="ko-KR" altLang="en-US" sz="1000" dirty="0">
+                <a:solidFill>
+                  <a:schemeClr val="bg2">
+                    <a:lumMod val="50000"/>
+                  </a:schemeClr>
+                </a:solidFill>
+                <a:latin typeface="바탕체" panose="02030609000101010101" pitchFamily="17" charset="-127"/>
+                <a:ea typeface="바탕체" panose="02030609000101010101" pitchFamily="17" charset="-127"/>
+              </a:rPr>
+              <a:t>구역</a:t>
+            </a:r>
+          </a:p>
+        </p:txBody>
+      </p:sp>
+      <p:sp>
+        <p:nvSpPr>
+          <p:cNvPr id="11" name="직사각형 10">
+            <a:extLst>
+              <a:ext uri="{FF2B5EF4-FFF2-40B4-BE49-F238E27FC236}">
+                <a16:creationId xmlns:a16="http://schemas.microsoft.com/office/drawing/2014/main" id="{15E9C17E-FEDB-03F0-9EA2-EEB35D26FD68}"/>
+              </a:ext>
+            </a:extLst>
+          </p:cNvPr>
+          <p:cNvSpPr/>
+          <p:nvPr/>
+        </p:nvSpPr>
+        <p:spPr>
+          <a:xfrm>
+            <a:off x="1493982" y="2846901"/>
+            <a:ext cx="588819" cy="1164198"/>
+          </a:xfrm>
+          <a:prstGeom prst="rect">
+            <a:avLst/>
+          </a:prstGeom>
+          <a:noFill/>
+          <a:ln w="9525">
+            <a:solidFill>
+              <a:schemeClr val="tx1">
+                <a:alpha val="50000"/>
+              </a:schemeClr>
+            </a:solidFill>
+          </a:ln>
+        </p:spPr>
+        <p:style>
+          <a:lnRef idx="2">
+            <a:schemeClr val="accent1">
+              <a:shade val="15000"/>
+            </a:schemeClr>
+          </a:lnRef>
+          <a:fillRef idx="1">
+            <a:schemeClr val="accent1"/>
+          </a:fillRef>
+          <a:effectRef idx="0">
+            <a:schemeClr val="accent1"/>
+          </a:effectRef>
+          <a:fontRef idx="minor">
+            <a:schemeClr val="lt1"/>
+          </a:fontRef>
+        </p:style>
+        <p:txBody>
+          <a:bodyPr rtlCol="0" anchor="ctr"/>
+          <a:lstStyle/>
+          <a:p>
+            <a:pPr algn="ctr"/>
+            <a:r>
+              <a:rPr lang="ko-KR" altLang="en-US" sz="1000" dirty="0">
+                <a:solidFill>
+                  <a:schemeClr val="bg2">
+                    <a:lumMod val="50000"/>
+                  </a:schemeClr>
+                </a:solidFill>
+                <a:latin typeface="바탕체" panose="02030609000101010101" pitchFamily="17" charset="-127"/>
+                <a:ea typeface="바탕체" panose="02030609000101010101" pitchFamily="17" charset="-127"/>
+              </a:rPr>
+              <a:t>자전거</a:t>
+            </a:r>
+            <a:endParaRPr lang="en-US" altLang="ko-KR" sz="1000" dirty="0">
+              <a:solidFill>
+                <a:schemeClr val="bg2">
+                  <a:lumMod val="50000"/>
+                </a:schemeClr>
+              </a:solidFill>
+              <a:latin typeface="바탕체" panose="02030609000101010101" pitchFamily="17" charset="-127"/>
+              <a:ea typeface="바탕체" panose="02030609000101010101" pitchFamily="17" charset="-127"/>
+            </a:endParaRPr>
+          </a:p>
+          <a:p>
+            <a:pPr algn="ctr"/>
+            <a:r>
+              <a:rPr lang="ko-KR" altLang="en-US" sz="1000" dirty="0">
+                <a:solidFill>
+                  <a:schemeClr val="bg2">
+                    <a:lumMod val="50000"/>
+                  </a:schemeClr>
+                </a:solidFill>
+                <a:latin typeface="바탕체" panose="02030609000101010101" pitchFamily="17" charset="-127"/>
+                <a:ea typeface="바탕체" panose="02030609000101010101" pitchFamily="17" charset="-127"/>
+              </a:rPr>
+              <a:t>보관소</a:t>
+            </a:r>
+            <a:endParaRPr lang="en-US" altLang="ko-KR" sz="1000" dirty="0">
+              <a:solidFill>
+                <a:schemeClr val="bg2">
+                  <a:lumMod val="50000"/>
+                </a:schemeClr>
+              </a:solidFill>
+              <a:latin typeface="바탕체" panose="02030609000101010101" pitchFamily="17" charset="-127"/>
+              <a:ea typeface="바탕체" panose="02030609000101010101" pitchFamily="17" charset="-127"/>
+            </a:endParaRPr>
+          </a:p>
+        </p:txBody>
+      </p:sp>
+      <p:sp>
+        <p:nvSpPr>
+          <p:cNvPr id="13" name="직사각형 12">
+            <a:extLst>
+              <a:ext uri="{FF2B5EF4-FFF2-40B4-BE49-F238E27FC236}">
+                <a16:creationId xmlns:a16="http://schemas.microsoft.com/office/drawing/2014/main" id="{270D87EB-FDEB-A8DC-F5C9-14571A565569}"/>
+              </a:ext>
+            </a:extLst>
+          </p:cNvPr>
+          <p:cNvSpPr/>
+          <p:nvPr/>
+        </p:nvSpPr>
+        <p:spPr>
+          <a:xfrm>
+            <a:off x="2757055" y="967245"/>
+            <a:ext cx="6153726" cy="346790"/>
+          </a:xfrm>
+          <a:prstGeom prst="rect">
+            <a:avLst/>
+          </a:prstGeom>
+          <a:noFill/>
+          <a:ln w="9525">
+            <a:solidFill>
+              <a:schemeClr val="tx1">
+                <a:alpha val="50000"/>
+              </a:schemeClr>
+            </a:solidFill>
+          </a:ln>
+        </p:spPr>
+        <p:style>
+          <a:lnRef idx="2">
+            <a:schemeClr val="accent1">
+              <a:shade val="15000"/>
+            </a:schemeClr>
+          </a:lnRef>
+          <a:fillRef idx="1">
+            <a:schemeClr val="accent1"/>
+          </a:fillRef>
+          <a:effectRef idx="0">
+            <a:schemeClr val="accent1"/>
+          </a:effectRef>
+          <a:fontRef idx="minor">
+            <a:schemeClr val="lt1"/>
+          </a:fontRef>
+        </p:style>
+        <p:txBody>
+          <a:bodyPr rtlCol="0" anchor="ctr"/>
+          <a:lstStyle/>
+          <a:p>
+            <a:pPr algn="ctr"/>
+            <a:r>
+              <a:rPr lang="ko-KR" altLang="en-US" sz="1000" dirty="0">
+                <a:solidFill>
+                  <a:schemeClr val="bg2">
+                    <a:lumMod val="50000"/>
+                  </a:schemeClr>
+                </a:solidFill>
+                <a:latin typeface="바탕체" panose="02030609000101010101" pitchFamily="17" charset="-127"/>
+                <a:ea typeface="바탕체" panose="02030609000101010101" pitchFamily="17" charset="-127"/>
+              </a:rPr>
+              <a:t>화단</a:t>
+            </a:r>
+          </a:p>
+        </p:txBody>
+      </p:sp>
+      <p:grpSp>
+        <p:nvGrpSpPr>
+          <p:cNvPr id="192" name="그룹 191">
+            <a:extLst>
+              <a:ext uri="{FF2B5EF4-FFF2-40B4-BE49-F238E27FC236}">
+                <a16:creationId xmlns:a16="http://schemas.microsoft.com/office/drawing/2014/main" id="{A3B078FF-E887-4852-57C4-FE24C45F8CFE}"/>
+              </a:ext>
+            </a:extLst>
+          </p:cNvPr>
+          <p:cNvGrpSpPr/>
+          <p:nvPr/>
+        </p:nvGrpSpPr>
+        <p:grpSpPr>
+          <a:xfrm rot="10800000">
+            <a:off x="9883746" y="1221353"/>
+            <a:ext cx="868218" cy="3806115"/>
+            <a:chOff x="9199419" y="1164622"/>
+            <a:chExt cx="868218" cy="3806115"/>
+          </a:xfrm>
+        </p:grpSpPr>
+        <p:sp>
+          <p:nvSpPr>
+            <p:cNvPr id="15" name="직사각형 14">
+              <a:extLst>
+                <a:ext uri="{FF2B5EF4-FFF2-40B4-BE49-F238E27FC236}">
+                  <a16:creationId xmlns:a16="http://schemas.microsoft.com/office/drawing/2014/main" id="{88B52526-1D2B-F18F-4BCD-3A1DC0AFF267}"/>
+                </a:ext>
+              </a:extLst>
+            </p:cNvPr>
+            <p:cNvSpPr/>
+            <p:nvPr/>
+          </p:nvSpPr>
+          <p:spPr>
+            <a:xfrm>
+              <a:off x="9199419" y="1164622"/>
+              <a:ext cx="868218" cy="3806115"/>
+            </a:xfrm>
+            <a:prstGeom prst="rect">
+              <a:avLst/>
+            </a:prstGeom>
+            <a:noFill/>
+            <a:ln w="9525">
+              <a:solidFill>
+                <a:schemeClr val="tx1">
+                  <a:alpha val="50000"/>
+                </a:schemeClr>
+              </a:solidFill>
+            </a:ln>
+          </p:spPr>
+          <p:style>
+            <a:lnRef idx="2">
+              <a:schemeClr val="accent1">
+                <a:shade val="15000"/>
+              </a:schemeClr>
+            </a:lnRef>
+            <a:fillRef idx="1">
+              <a:schemeClr val="accent1"/>
+            </a:fillRef>
+            <a:effectRef idx="0">
+              <a:schemeClr val="accent1"/>
+            </a:effectRef>
+            <a:fontRef idx="minor">
+              <a:schemeClr val="lt1"/>
+            </a:fontRef>
+          </p:style>
+          <p:txBody>
+            <a:bodyPr rtlCol="0" anchor="ctr"/>
+            <a:lstStyle/>
+            <a:p>
+              <a:pPr algn="ctr"/>
+              <a:endParaRPr lang="ko-KR" altLang="en-US" sz="1000">
+                <a:solidFill>
+                  <a:schemeClr val="bg2">
+                    <a:lumMod val="50000"/>
+                  </a:schemeClr>
+                </a:solidFill>
+                <a:latin typeface="바탕체" panose="02030609000101010101" pitchFamily="17" charset="-127"/>
+                <a:ea typeface="바탕체" panose="02030609000101010101" pitchFamily="17" charset="-127"/>
+              </a:endParaRPr>
+            </a:p>
+          </p:txBody>
+        </p:sp>
+        <p:sp>
+          <p:nvSpPr>
+            <p:cNvPr id="181" name="직사각형 180">
+              <a:extLst>
+                <a:ext uri="{FF2B5EF4-FFF2-40B4-BE49-F238E27FC236}">
+                  <a16:creationId xmlns:a16="http://schemas.microsoft.com/office/drawing/2014/main" id="{5E9C920E-4DDE-1F99-BEF4-B891B958ED65}"/>
+                </a:ext>
+              </a:extLst>
+            </p:cNvPr>
+            <p:cNvSpPr/>
+            <p:nvPr/>
+          </p:nvSpPr>
+          <p:spPr>
+            <a:xfrm flipV="1">
+              <a:off x="9227992" y="1192229"/>
+              <a:ext cx="811357" cy="385560"/>
+            </a:xfrm>
+            <a:prstGeom prst="rect">
+              <a:avLst/>
+            </a:prstGeom>
+            <a:noFill/>
+            <a:ln w="9525">
+              <a:solidFill>
+                <a:schemeClr val="tx1">
+                  <a:alpha val="50000"/>
+                </a:schemeClr>
+              </a:solidFill>
+            </a:ln>
+          </p:spPr>
+          <p:style>
+            <a:lnRef idx="2">
+              <a:schemeClr val="accent1">
+                <a:shade val="15000"/>
+              </a:schemeClr>
+            </a:lnRef>
+            <a:fillRef idx="1">
+              <a:schemeClr val="accent1"/>
+            </a:fillRef>
+            <a:effectRef idx="0">
+              <a:schemeClr val="accent1"/>
+            </a:effectRef>
+            <a:fontRef idx="minor">
+              <a:schemeClr val="lt1"/>
+            </a:fontRef>
+          </p:style>
+          <p:txBody>
+            <a:bodyPr rtlCol="0" anchor="ctr"/>
+            <a:lstStyle/>
+            <a:p>
+              <a:pPr algn="ctr"/>
+              <a:r>
+                <a:rPr lang="ko-KR" altLang="en-US" sz="1000" dirty="0">
+                  <a:solidFill>
+                    <a:schemeClr val="bg2">
+                      <a:lumMod val="50000"/>
+                    </a:schemeClr>
+                  </a:solidFill>
+                  <a:latin typeface="바탕체" panose="02030609000101010101" pitchFamily="17" charset="-127"/>
+                  <a:ea typeface="바탕체" panose="02030609000101010101" pitchFamily="17" charset="-127"/>
+                </a:rPr>
+                <a:t>주차장</a:t>
+              </a:r>
+            </a:p>
+          </p:txBody>
+        </p:sp>
+        <p:sp>
+          <p:nvSpPr>
+            <p:cNvPr id="182" name="직사각형 181">
+              <a:extLst>
+                <a:ext uri="{FF2B5EF4-FFF2-40B4-BE49-F238E27FC236}">
+                  <a16:creationId xmlns:a16="http://schemas.microsoft.com/office/drawing/2014/main" id="{E05AEE96-966A-ADF1-2616-10B4F903BE25}"/>
+                </a:ext>
+              </a:extLst>
+            </p:cNvPr>
+            <p:cNvSpPr/>
+            <p:nvPr/>
+          </p:nvSpPr>
+          <p:spPr>
+            <a:xfrm flipV="1">
+              <a:off x="9227992" y="1609049"/>
+              <a:ext cx="811357" cy="385560"/>
+            </a:xfrm>
+            <a:prstGeom prst="rect">
+              <a:avLst/>
+            </a:prstGeom>
+            <a:noFill/>
+            <a:ln w="9525">
+              <a:solidFill>
+                <a:schemeClr val="tx1">
+                  <a:alpha val="50000"/>
+                </a:schemeClr>
+              </a:solidFill>
+            </a:ln>
+          </p:spPr>
+          <p:style>
+            <a:lnRef idx="2">
+              <a:schemeClr val="accent1">
+                <a:shade val="15000"/>
+              </a:schemeClr>
+            </a:lnRef>
+            <a:fillRef idx="1">
+              <a:schemeClr val="accent1"/>
+            </a:fillRef>
+            <a:effectRef idx="0">
+              <a:schemeClr val="accent1"/>
+            </a:effectRef>
+            <a:fontRef idx="minor">
+              <a:schemeClr val="lt1"/>
+            </a:fontRef>
+          </p:style>
+          <p:txBody>
+            <a:bodyPr rtlCol="0" anchor="ctr"/>
+            <a:lstStyle/>
+            <a:p>
+              <a:pPr algn="ctr"/>
+              <a:endParaRPr lang="ko-KR" altLang="en-US" sz="1000">
+                <a:solidFill>
+                  <a:schemeClr val="bg2">
+                    <a:lumMod val="50000"/>
+                  </a:schemeClr>
+                </a:solidFill>
+                <a:latin typeface="바탕체" panose="02030609000101010101" pitchFamily="17" charset="-127"/>
+                <a:ea typeface="바탕체" panose="02030609000101010101" pitchFamily="17" charset="-127"/>
+              </a:endParaRPr>
+            </a:p>
+          </p:txBody>
+        </p:sp>
+        <p:sp>
+          <p:nvSpPr>
+            <p:cNvPr id="183" name="직사각형 182">
+              <a:extLst>
+                <a:ext uri="{FF2B5EF4-FFF2-40B4-BE49-F238E27FC236}">
+                  <a16:creationId xmlns:a16="http://schemas.microsoft.com/office/drawing/2014/main" id="{6ECE43BA-6EC6-E94B-501E-0911F0255979}"/>
+                </a:ext>
+              </a:extLst>
+            </p:cNvPr>
+            <p:cNvSpPr/>
+            <p:nvPr/>
+          </p:nvSpPr>
+          <p:spPr>
+            <a:xfrm flipV="1">
+              <a:off x="9227992" y="2028880"/>
+              <a:ext cx="811357" cy="385560"/>
+            </a:xfrm>
+            <a:prstGeom prst="rect">
+              <a:avLst/>
+            </a:prstGeom>
+            <a:noFill/>
+            <a:ln w="9525">
+              <a:solidFill>
+                <a:schemeClr val="tx1">
+                  <a:alpha val="50000"/>
+                </a:schemeClr>
+              </a:solidFill>
+            </a:ln>
+          </p:spPr>
+          <p:style>
+            <a:lnRef idx="2">
+              <a:schemeClr val="accent1">
+                <a:shade val="15000"/>
+              </a:schemeClr>
+            </a:lnRef>
+            <a:fillRef idx="1">
+              <a:schemeClr val="accent1"/>
+            </a:fillRef>
+            <a:effectRef idx="0">
+              <a:schemeClr val="accent1"/>
+            </a:effectRef>
+            <a:fontRef idx="minor">
+              <a:schemeClr val="lt1"/>
+            </a:fontRef>
+          </p:style>
+          <p:txBody>
+            <a:bodyPr rtlCol="0" anchor="ctr"/>
+            <a:lstStyle/>
+            <a:p>
+              <a:pPr algn="ctr"/>
+              <a:endParaRPr lang="ko-KR" altLang="en-US" sz="1000">
+                <a:solidFill>
+                  <a:schemeClr val="bg2">
+                    <a:lumMod val="50000"/>
+                  </a:schemeClr>
+                </a:solidFill>
+                <a:latin typeface="바탕체" panose="02030609000101010101" pitchFamily="17" charset="-127"/>
+                <a:ea typeface="바탕체" panose="02030609000101010101" pitchFamily="17" charset="-127"/>
+              </a:endParaRPr>
+            </a:p>
+          </p:txBody>
+        </p:sp>
+        <p:sp>
+          <p:nvSpPr>
+            <p:cNvPr id="184" name="직사각형 183">
+              <a:extLst>
+                <a:ext uri="{FF2B5EF4-FFF2-40B4-BE49-F238E27FC236}">
+                  <a16:creationId xmlns:a16="http://schemas.microsoft.com/office/drawing/2014/main" id="{DA913F9D-9ED8-BAC4-55CA-C3E92AB16E21}"/>
+                </a:ext>
+              </a:extLst>
+            </p:cNvPr>
+            <p:cNvSpPr/>
+            <p:nvPr/>
+          </p:nvSpPr>
+          <p:spPr>
+            <a:xfrm flipV="1">
+              <a:off x="9227992" y="2445700"/>
+              <a:ext cx="811357" cy="385560"/>
+            </a:xfrm>
+            <a:prstGeom prst="rect">
+              <a:avLst/>
+            </a:prstGeom>
+            <a:noFill/>
+            <a:ln w="9525">
+              <a:solidFill>
+                <a:schemeClr val="tx1">
+                  <a:alpha val="50000"/>
+                </a:schemeClr>
+              </a:solidFill>
+            </a:ln>
+          </p:spPr>
+          <p:style>
+            <a:lnRef idx="2">
+              <a:schemeClr val="accent1">
+                <a:shade val="15000"/>
+              </a:schemeClr>
+            </a:lnRef>
+            <a:fillRef idx="1">
+              <a:schemeClr val="accent1"/>
+            </a:fillRef>
+            <a:effectRef idx="0">
+              <a:schemeClr val="accent1"/>
+            </a:effectRef>
+            <a:fontRef idx="minor">
+              <a:schemeClr val="lt1"/>
+            </a:fontRef>
+          </p:style>
+          <p:txBody>
+            <a:bodyPr rtlCol="0" anchor="ctr"/>
+            <a:lstStyle/>
+            <a:p>
+              <a:pPr algn="ctr"/>
+              <a:endParaRPr lang="ko-KR" altLang="en-US" sz="1000">
+                <a:solidFill>
+                  <a:schemeClr val="bg2">
+                    <a:lumMod val="50000"/>
+                  </a:schemeClr>
+                </a:solidFill>
+                <a:latin typeface="바탕체" panose="02030609000101010101" pitchFamily="17" charset="-127"/>
+                <a:ea typeface="바탕체" panose="02030609000101010101" pitchFamily="17" charset="-127"/>
+              </a:endParaRPr>
+            </a:p>
+          </p:txBody>
+        </p:sp>
+        <p:sp>
+          <p:nvSpPr>
+            <p:cNvPr id="185" name="직사각형 184">
+              <a:extLst>
+                <a:ext uri="{FF2B5EF4-FFF2-40B4-BE49-F238E27FC236}">
+                  <a16:creationId xmlns:a16="http://schemas.microsoft.com/office/drawing/2014/main" id="{0E388F8A-F48C-FCB0-B5BF-D6ACC754C1E5}"/>
+                </a:ext>
+              </a:extLst>
+            </p:cNvPr>
+            <p:cNvSpPr/>
+            <p:nvPr/>
+          </p:nvSpPr>
+          <p:spPr>
+            <a:xfrm flipV="1">
+              <a:off x="9227992" y="2875419"/>
+              <a:ext cx="811357" cy="385560"/>
+            </a:xfrm>
+            <a:prstGeom prst="rect">
+              <a:avLst/>
+            </a:prstGeom>
+            <a:noFill/>
+            <a:ln w="9525">
+              <a:solidFill>
+                <a:schemeClr val="tx1">
+                  <a:alpha val="50000"/>
+                </a:schemeClr>
+              </a:solidFill>
+            </a:ln>
+          </p:spPr>
+          <p:style>
+            <a:lnRef idx="2">
+              <a:schemeClr val="accent1">
+                <a:shade val="15000"/>
+              </a:schemeClr>
+            </a:lnRef>
+            <a:fillRef idx="1">
+              <a:schemeClr val="accent1"/>
+            </a:fillRef>
+            <a:effectRef idx="0">
+              <a:schemeClr val="accent1"/>
+            </a:effectRef>
+            <a:fontRef idx="minor">
+              <a:schemeClr val="lt1"/>
+            </a:fontRef>
+          </p:style>
+          <p:txBody>
+            <a:bodyPr rtlCol="0" anchor="ctr"/>
+            <a:lstStyle/>
+            <a:p>
+              <a:pPr algn="ctr"/>
+              <a:endParaRPr lang="ko-KR" altLang="en-US" sz="1000">
+                <a:solidFill>
+                  <a:schemeClr val="bg2">
+                    <a:lumMod val="50000"/>
+                  </a:schemeClr>
+                </a:solidFill>
+                <a:latin typeface="바탕체" panose="02030609000101010101" pitchFamily="17" charset="-127"/>
+                <a:ea typeface="바탕체" panose="02030609000101010101" pitchFamily="17" charset="-127"/>
+              </a:endParaRPr>
+            </a:p>
+          </p:txBody>
+        </p:sp>
+        <p:sp>
+          <p:nvSpPr>
+            <p:cNvPr id="186" name="직사각형 185">
+              <a:extLst>
+                <a:ext uri="{FF2B5EF4-FFF2-40B4-BE49-F238E27FC236}">
+                  <a16:creationId xmlns:a16="http://schemas.microsoft.com/office/drawing/2014/main" id="{139FB873-BC85-CF4E-806C-25101FB9554E}"/>
+                </a:ext>
+              </a:extLst>
+            </p:cNvPr>
+            <p:cNvSpPr/>
+            <p:nvPr/>
+          </p:nvSpPr>
+          <p:spPr>
+            <a:xfrm flipV="1">
+              <a:off x="9227992" y="3292239"/>
+              <a:ext cx="811357" cy="385560"/>
+            </a:xfrm>
+            <a:prstGeom prst="rect">
+              <a:avLst/>
+            </a:prstGeom>
+            <a:noFill/>
+            <a:ln w="9525">
+              <a:solidFill>
+                <a:schemeClr val="tx1">
+                  <a:alpha val="50000"/>
+                </a:schemeClr>
+              </a:solidFill>
+            </a:ln>
+          </p:spPr>
+          <p:style>
+            <a:lnRef idx="2">
+              <a:schemeClr val="accent1">
+                <a:shade val="15000"/>
+              </a:schemeClr>
+            </a:lnRef>
+            <a:fillRef idx="1">
+              <a:schemeClr val="accent1"/>
+            </a:fillRef>
+            <a:effectRef idx="0">
+              <a:schemeClr val="accent1"/>
+            </a:effectRef>
+            <a:fontRef idx="minor">
+              <a:schemeClr val="lt1"/>
+            </a:fontRef>
+          </p:style>
+          <p:txBody>
+            <a:bodyPr rtlCol="0" anchor="ctr"/>
+            <a:lstStyle/>
+            <a:p>
+              <a:pPr algn="ctr"/>
+              <a:endParaRPr lang="ko-KR" altLang="en-US" sz="1000">
+                <a:solidFill>
+                  <a:schemeClr val="bg2">
+                    <a:lumMod val="50000"/>
+                  </a:schemeClr>
+                </a:solidFill>
+                <a:latin typeface="바탕체" panose="02030609000101010101" pitchFamily="17" charset="-127"/>
+                <a:ea typeface="바탕체" panose="02030609000101010101" pitchFamily="17" charset="-127"/>
+              </a:endParaRPr>
+            </a:p>
+          </p:txBody>
+        </p:sp>
+        <p:sp>
+          <p:nvSpPr>
+            <p:cNvPr id="187" name="직사각형 186">
+              <a:extLst>
+                <a:ext uri="{FF2B5EF4-FFF2-40B4-BE49-F238E27FC236}">
+                  <a16:creationId xmlns:a16="http://schemas.microsoft.com/office/drawing/2014/main" id="{0CB62B6E-98A2-DAD0-C590-CD180AC4C9A4}"/>
+                </a:ext>
+              </a:extLst>
+            </p:cNvPr>
+            <p:cNvSpPr/>
+            <p:nvPr/>
+          </p:nvSpPr>
+          <p:spPr>
+            <a:xfrm flipV="1">
+              <a:off x="9227992" y="3706613"/>
+              <a:ext cx="811357" cy="385560"/>
+            </a:xfrm>
+            <a:prstGeom prst="rect">
+              <a:avLst/>
+            </a:prstGeom>
+            <a:noFill/>
+            <a:ln w="9525">
+              <a:solidFill>
+                <a:schemeClr val="tx1">
+                  <a:alpha val="50000"/>
+                </a:schemeClr>
+              </a:solidFill>
+            </a:ln>
+          </p:spPr>
+          <p:style>
+            <a:lnRef idx="2">
+              <a:schemeClr val="accent1">
+                <a:shade val="15000"/>
+              </a:schemeClr>
+            </a:lnRef>
+            <a:fillRef idx="1">
+              <a:schemeClr val="accent1"/>
+            </a:fillRef>
+            <a:effectRef idx="0">
+              <a:schemeClr val="accent1"/>
+            </a:effectRef>
+            <a:fontRef idx="minor">
+              <a:schemeClr val="lt1"/>
+            </a:fontRef>
+          </p:style>
+          <p:txBody>
+            <a:bodyPr rtlCol="0" anchor="ctr"/>
+            <a:lstStyle/>
+            <a:p>
+              <a:pPr algn="ctr"/>
+              <a:endParaRPr lang="ko-KR" altLang="en-US" sz="1000">
+                <a:solidFill>
+                  <a:schemeClr val="bg2">
+                    <a:lumMod val="50000"/>
+                  </a:schemeClr>
+                </a:solidFill>
+                <a:latin typeface="바탕체" panose="02030609000101010101" pitchFamily="17" charset="-127"/>
+                <a:ea typeface="바탕체" panose="02030609000101010101" pitchFamily="17" charset="-127"/>
+              </a:endParaRPr>
+            </a:p>
+          </p:txBody>
+        </p:sp>
+        <p:sp>
+          <p:nvSpPr>
+            <p:cNvPr id="188" name="직사각형 187">
+              <a:extLst>
+                <a:ext uri="{FF2B5EF4-FFF2-40B4-BE49-F238E27FC236}">
+                  <a16:creationId xmlns:a16="http://schemas.microsoft.com/office/drawing/2014/main" id="{3272D026-D18C-CAA1-7C40-815052E0D2C6}"/>
+                </a:ext>
+              </a:extLst>
+            </p:cNvPr>
+            <p:cNvSpPr/>
+            <p:nvPr/>
+          </p:nvSpPr>
+          <p:spPr>
+            <a:xfrm flipV="1">
+              <a:off x="9227992" y="4123433"/>
+              <a:ext cx="811357" cy="385560"/>
+            </a:xfrm>
+            <a:prstGeom prst="rect">
+              <a:avLst/>
+            </a:prstGeom>
+            <a:noFill/>
+            <a:ln w="9525">
+              <a:solidFill>
+                <a:schemeClr val="tx1">
+                  <a:alpha val="50000"/>
+                </a:schemeClr>
+              </a:solidFill>
+            </a:ln>
+          </p:spPr>
+          <p:style>
+            <a:lnRef idx="2">
+              <a:schemeClr val="accent1">
+                <a:shade val="15000"/>
+              </a:schemeClr>
+            </a:lnRef>
+            <a:fillRef idx="1">
+              <a:schemeClr val="accent1"/>
+            </a:fillRef>
+            <a:effectRef idx="0">
+              <a:schemeClr val="accent1"/>
+            </a:effectRef>
+            <a:fontRef idx="minor">
+              <a:schemeClr val="lt1"/>
+            </a:fontRef>
+          </p:style>
+          <p:txBody>
+            <a:bodyPr rtlCol="0" anchor="ctr"/>
+            <a:lstStyle/>
+            <a:p>
+              <a:pPr algn="ctr"/>
+              <a:endParaRPr lang="ko-KR" altLang="en-US" sz="1000">
+                <a:solidFill>
+                  <a:schemeClr val="bg2">
+                    <a:lumMod val="50000"/>
+                  </a:schemeClr>
+                </a:solidFill>
+                <a:latin typeface="바탕체" panose="02030609000101010101" pitchFamily="17" charset="-127"/>
+                <a:ea typeface="바탕체" panose="02030609000101010101" pitchFamily="17" charset="-127"/>
+              </a:endParaRPr>
+            </a:p>
+          </p:txBody>
+        </p:sp>
+        <p:sp>
+          <p:nvSpPr>
+            <p:cNvPr id="189" name="직사각형 188">
+              <a:extLst>
+                <a:ext uri="{FF2B5EF4-FFF2-40B4-BE49-F238E27FC236}">
+                  <a16:creationId xmlns:a16="http://schemas.microsoft.com/office/drawing/2014/main" id="{8D2DBA8A-307F-A556-6087-974488EBC578}"/>
+                </a:ext>
+              </a:extLst>
+            </p:cNvPr>
+            <p:cNvSpPr/>
+            <p:nvPr/>
+          </p:nvSpPr>
+          <p:spPr>
+            <a:xfrm flipV="1">
+              <a:off x="9227992" y="4533537"/>
+              <a:ext cx="811357" cy="385560"/>
+            </a:xfrm>
+            <a:prstGeom prst="rect">
+              <a:avLst/>
+            </a:prstGeom>
+            <a:noFill/>
+            <a:ln w="9525">
+              <a:solidFill>
+                <a:schemeClr val="tx1">
+                  <a:alpha val="50000"/>
+                </a:schemeClr>
+              </a:solidFill>
+            </a:ln>
+          </p:spPr>
+          <p:style>
+            <a:lnRef idx="2">
+              <a:schemeClr val="accent1">
+                <a:shade val="15000"/>
+              </a:schemeClr>
+            </a:lnRef>
+            <a:fillRef idx="1">
+              <a:schemeClr val="accent1"/>
+            </a:fillRef>
+            <a:effectRef idx="0">
+              <a:schemeClr val="accent1"/>
+            </a:effectRef>
+            <a:fontRef idx="minor">
+              <a:schemeClr val="lt1"/>
+            </a:fontRef>
+          </p:style>
+          <p:txBody>
+            <a:bodyPr rtlCol="0" anchor="ctr"/>
+            <a:lstStyle/>
+            <a:p>
+              <a:pPr algn="ctr"/>
+              <a:endParaRPr lang="ko-KR" altLang="en-US" sz="1000">
+                <a:solidFill>
+                  <a:schemeClr val="bg2">
+                    <a:lumMod val="50000"/>
+                  </a:schemeClr>
+                </a:solidFill>
+                <a:latin typeface="바탕체" panose="02030609000101010101" pitchFamily="17" charset="-127"/>
+                <a:ea typeface="바탕체" panose="02030609000101010101" pitchFamily="17" charset="-127"/>
+              </a:endParaRPr>
+            </a:p>
+          </p:txBody>
+        </p:sp>
+      </p:grpSp>
+      <p:sp>
+        <p:nvSpPr>
+          <p:cNvPr id="191" name="직사각형 190">
+            <a:extLst>
+              <a:ext uri="{FF2B5EF4-FFF2-40B4-BE49-F238E27FC236}">
+                <a16:creationId xmlns:a16="http://schemas.microsoft.com/office/drawing/2014/main" id="{4E3B94ED-B22E-B0D4-0DB4-7FF6EA1DF6ED}"/>
+              </a:ext>
+            </a:extLst>
+          </p:cNvPr>
+          <p:cNvSpPr/>
+          <p:nvPr/>
+        </p:nvSpPr>
+        <p:spPr>
+          <a:xfrm rot="16200000">
+            <a:off x="10179047" y="5670256"/>
+            <a:ext cx="1168488" cy="98633"/>
+          </a:xfrm>
+          <a:prstGeom prst="rect">
+            <a:avLst/>
+          </a:prstGeom>
+          <a:noFill/>
+          <a:ln w="9525">
+            <a:solidFill>
+              <a:schemeClr val="tx1">
+                <a:alpha val="50000"/>
+              </a:schemeClr>
+            </a:solidFill>
+          </a:ln>
+        </p:spPr>
+        <p:style>
+          <a:lnRef idx="2">
+            <a:schemeClr val="accent1">
+              <a:shade val="15000"/>
+            </a:schemeClr>
+          </a:lnRef>
+          <a:fillRef idx="1">
+            <a:schemeClr val="accent1"/>
+          </a:fillRef>
+          <a:effectRef idx="0">
+            <a:schemeClr val="accent1"/>
+          </a:effectRef>
+          <a:fontRef idx="minor">
+            <a:schemeClr val="lt1"/>
+          </a:fontRef>
+        </p:style>
+        <p:txBody>
+          <a:bodyPr rtlCol="0" anchor="ctr"/>
+          <a:lstStyle/>
+          <a:p>
+            <a:pPr algn="ctr"/>
+            <a:endParaRPr lang="ko-KR" altLang="en-US" sz="1000" dirty="0">
+              <a:solidFill>
+                <a:schemeClr val="tx1"/>
+              </a:solidFill>
+              <a:latin typeface="바탕체" panose="02030609000101010101" pitchFamily="17" charset="-127"/>
+              <a:ea typeface="바탕체" panose="02030609000101010101" pitchFamily="17" charset="-127"/>
+            </a:endParaRPr>
+          </a:p>
+        </p:txBody>
+      </p:sp>
+      <p:grpSp>
+        <p:nvGrpSpPr>
+          <p:cNvPr id="193" name="그룹 192">
+            <a:extLst>
+              <a:ext uri="{FF2B5EF4-FFF2-40B4-BE49-F238E27FC236}">
+                <a16:creationId xmlns:a16="http://schemas.microsoft.com/office/drawing/2014/main" id="{411C133F-4D33-0F21-2B1C-2F4991666E26}"/>
+              </a:ext>
+            </a:extLst>
+          </p:cNvPr>
+          <p:cNvGrpSpPr/>
+          <p:nvPr/>
+        </p:nvGrpSpPr>
+        <p:grpSpPr>
+          <a:xfrm rot="5400000">
+            <a:off x="2895966" y="4069982"/>
+            <a:ext cx="868218" cy="3806115"/>
+            <a:chOff x="9199419" y="1164622"/>
+            <a:chExt cx="868218" cy="3806115"/>
+          </a:xfrm>
+        </p:grpSpPr>
+        <p:sp>
+          <p:nvSpPr>
+            <p:cNvPr id="194" name="직사각형 193">
+              <a:extLst>
+                <a:ext uri="{FF2B5EF4-FFF2-40B4-BE49-F238E27FC236}">
+                  <a16:creationId xmlns:a16="http://schemas.microsoft.com/office/drawing/2014/main" id="{DF853685-7E24-15FD-689D-94D4D4FCEB95}"/>
+                </a:ext>
+              </a:extLst>
+            </p:cNvPr>
+            <p:cNvSpPr/>
+            <p:nvPr/>
+          </p:nvSpPr>
+          <p:spPr>
+            <a:xfrm>
+              <a:off x="9199419" y="1164622"/>
+              <a:ext cx="868218" cy="3806115"/>
+            </a:xfrm>
+            <a:prstGeom prst="rect">
+              <a:avLst/>
+            </a:prstGeom>
+            <a:noFill/>
+            <a:ln w="9525">
+              <a:solidFill>
+                <a:schemeClr val="tx1">
+                  <a:alpha val="50000"/>
+                </a:schemeClr>
+              </a:solidFill>
+            </a:ln>
+          </p:spPr>
+          <p:style>
+            <a:lnRef idx="2">
+              <a:schemeClr val="accent1">
+                <a:shade val="15000"/>
+              </a:schemeClr>
+            </a:lnRef>
+            <a:fillRef idx="1">
+              <a:schemeClr val="accent1"/>
+            </a:fillRef>
+            <a:effectRef idx="0">
+              <a:schemeClr val="accent1"/>
+            </a:effectRef>
+            <a:fontRef idx="minor">
+              <a:schemeClr val="lt1"/>
+            </a:fontRef>
+          </p:style>
+          <p:txBody>
+            <a:bodyPr rtlCol="0" anchor="ctr"/>
+            <a:lstStyle/>
+            <a:p>
+              <a:pPr algn="ctr"/>
+              <a:endParaRPr lang="ko-KR" altLang="en-US" sz="1000">
+                <a:solidFill>
+                  <a:schemeClr val="bg2">
+                    <a:lumMod val="50000"/>
+                  </a:schemeClr>
+                </a:solidFill>
+                <a:latin typeface="바탕체" panose="02030609000101010101" pitchFamily="17" charset="-127"/>
+                <a:ea typeface="바탕체" panose="02030609000101010101" pitchFamily="17" charset="-127"/>
+              </a:endParaRPr>
+            </a:p>
+          </p:txBody>
+        </p:sp>
+        <p:sp>
+          <p:nvSpPr>
+            <p:cNvPr id="195" name="직사각형 194">
+              <a:extLst>
+                <a:ext uri="{FF2B5EF4-FFF2-40B4-BE49-F238E27FC236}">
+                  <a16:creationId xmlns:a16="http://schemas.microsoft.com/office/drawing/2014/main" id="{FC824440-EC29-9E10-2A5C-3AA6B7BC4DA1}"/>
+                </a:ext>
+              </a:extLst>
+            </p:cNvPr>
+            <p:cNvSpPr/>
+            <p:nvPr/>
+          </p:nvSpPr>
+          <p:spPr>
+            <a:xfrm flipV="1">
+              <a:off x="9227992" y="1192229"/>
+              <a:ext cx="811357" cy="385560"/>
+            </a:xfrm>
+            <a:prstGeom prst="rect">
+              <a:avLst/>
+            </a:prstGeom>
+            <a:noFill/>
+            <a:ln w="9525">
+              <a:solidFill>
+                <a:schemeClr val="tx1">
+                  <a:alpha val="50000"/>
+                </a:schemeClr>
+              </a:solidFill>
+            </a:ln>
+          </p:spPr>
+          <p:style>
+            <a:lnRef idx="2">
+              <a:schemeClr val="accent1">
+                <a:shade val="15000"/>
+              </a:schemeClr>
+            </a:lnRef>
+            <a:fillRef idx="1">
+              <a:schemeClr val="accent1"/>
+            </a:fillRef>
+            <a:effectRef idx="0">
+              <a:schemeClr val="accent1"/>
+            </a:effectRef>
+            <a:fontRef idx="minor">
+              <a:schemeClr val="lt1"/>
+            </a:fontRef>
+          </p:style>
+          <p:txBody>
+            <a:bodyPr vert="eaVert" rtlCol="0" anchor="ctr"/>
+            <a:lstStyle/>
+            <a:p>
+              <a:pPr algn="ctr"/>
+              <a:r>
+                <a:rPr lang="ko-KR" altLang="en-US" sz="1000" dirty="0">
+                  <a:solidFill>
+                    <a:schemeClr val="bg2">
+                      <a:lumMod val="50000"/>
+                    </a:schemeClr>
+                  </a:solidFill>
+                  <a:latin typeface="바탕체" panose="02030609000101010101" pitchFamily="17" charset="-127"/>
+                  <a:ea typeface="바탕체" panose="02030609000101010101" pitchFamily="17" charset="-127"/>
+                </a:rPr>
+                <a:t>주</a:t>
+              </a:r>
+              <a:endParaRPr lang="en-US" altLang="ko-KR" sz="1000" dirty="0">
+                <a:solidFill>
+                  <a:schemeClr val="bg2">
+                    <a:lumMod val="50000"/>
+                  </a:schemeClr>
+                </a:solidFill>
+                <a:latin typeface="바탕체" panose="02030609000101010101" pitchFamily="17" charset="-127"/>
+                <a:ea typeface="바탕체" panose="02030609000101010101" pitchFamily="17" charset="-127"/>
+              </a:endParaRPr>
+            </a:p>
+            <a:p>
+              <a:pPr algn="ctr"/>
+              <a:r>
+                <a:rPr lang="ko-KR" altLang="en-US" sz="1000" dirty="0">
+                  <a:solidFill>
+                    <a:schemeClr val="bg2">
+                      <a:lumMod val="50000"/>
+                    </a:schemeClr>
+                  </a:solidFill>
+                  <a:latin typeface="바탕체" panose="02030609000101010101" pitchFamily="17" charset="-127"/>
+                  <a:ea typeface="바탕체" panose="02030609000101010101" pitchFamily="17" charset="-127"/>
+                </a:rPr>
+                <a:t>차</a:t>
+              </a:r>
+              <a:endParaRPr lang="en-US" altLang="ko-KR" sz="1000" dirty="0">
+                <a:solidFill>
+                  <a:schemeClr val="bg2">
+                    <a:lumMod val="50000"/>
+                  </a:schemeClr>
+                </a:solidFill>
+                <a:latin typeface="바탕체" panose="02030609000101010101" pitchFamily="17" charset="-127"/>
+                <a:ea typeface="바탕체" panose="02030609000101010101" pitchFamily="17" charset="-127"/>
+              </a:endParaRPr>
+            </a:p>
+            <a:p>
+              <a:pPr algn="ctr"/>
+              <a:r>
+                <a:rPr lang="ko-KR" altLang="en-US" sz="1000" dirty="0">
+                  <a:solidFill>
+                    <a:schemeClr val="bg2">
+                      <a:lumMod val="50000"/>
+                    </a:schemeClr>
+                  </a:solidFill>
+                  <a:latin typeface="바탕체" panose="02030609000101010101" pitchFamily="17" charset="-127"/>
+                  <a:ea typeface="바탕체" panose="02030609000101010101" pitchFamily="17" charset="-127"/>
+                </a:rPr>
+                <a:t>장</a:t>
+              </a:r>
+            </a:p>
+          </p:txBody>
+        </p:sp>
+        <p:sp>
+          <p:nvSpPr>
+            <p:cNvPr id="196" name="직사각형 195">
+              <a:extLst>
+                <a:ext uri="{FF2B5EF4-FFF2-40B4-BE49-F238E27FC236}">
+                  <a16:creationId xmlns:a16="http://schemas.microsoft.com/office/drawing/2014/main" id="{898B90E9-2655-8959-EF9B-78559BDA5D0D}"/>
+                </a:ext>
+              </a:extLst>
+            </p:cNvPr>
+            <p:cNvSpPr/>
+            <p:nvPr/>
+          </p:nvSpPr>
+          <p:spPr>
+            <a:xfrm flipV="1">
+              <a:off x="9227992" y="1609049"/>
+              <a:ext cx="811357" cy="385560"/>
+            </a:xfrm>
+            <a:prstGeom prst="rect">
+              <a:avLst/>
+            </a:prstGeom>
+            <a:noFill/>
+            <a:ln w="9525">
+              <a:solidFill>
+                <a:schemeClr val="tx1">
+                  <a:alpha val="50000"/>
+                </a:schemeClr>
+              </a:solidFill>
+            </a:ln>
+          </p:spPr>
+          <p:style>
+            <a:lnRef idx="2">
+              <a:schemeClr val="accent1">
+                <a:shade val="15000"/>
+              </a:schemeClr>
+            </a:lnRef>
+            <a:fillRef idx="1">
+              <a:schemeClr val="accent1"/>
+            </a:fillRef>
+            <a:effectRef idx="0">
+              <a:schemeClr val="accent1"/>
+            </a:effectRef>
+            <a:fontRef idx="minor">
+              <a:schemeClr val="lt1"/>
+            </a:fontRef>
+          </p:style>
+          <p:txBody>
+            <a:bodyPr rtlCol="0" anchor="ctr"/>
+            <a:lstStyle/>
+            <a:p>
+              <a:pPr algn="ctr"/>
+              <a:endParaRPr lang="ko-KR" altLang="en-US" sz="1000">
+                <a:solidFill>
+                  <a:schemeClr val="bg2">
+                    <a:lumMod val="50000"/>
+                  </a:schemeClr>
+                </a:solidFill>
+                <a:latin typeface="바탕체" panose="02030609000101010101" pitchFamily="17" charset="-127"/>
+                <a:ea typeface="바탕체" panose="02030609000101010101" pitchFamily="17" charset="-127"/>
+              </a:endParaRPr>
+            </a:p>
+          </p:txBody>
+        </p:sp>
+        <p:sp>
+          <p:nvSpPr>
+            <p:cNvPr id="197" name="직사각형 196">
+              <a:extLst>
+                <a:ext uri="{FF2B5EF4-FFF2-40B4-BE49-F238E27FC236}">
+                  <a16:creationId xmlns:a16="http://schemas.microsoft.com/office/drawing/2014/main" id="{6EE923C5-1C85-7F16-FE71-55031C88E523}"/>
+                </a:ext>
+              </a:extLst>
+            </p:cNvPr>
+            <p:cNvSpPr/>
+            <p:nvPr/>
+          </p:nvSpPr>
+          <p:spPr>
+            <a:xfrm flipV="1">
+              <a:off x="9227992" y="2028880"/>
+              <a:ext cx="811357" cy="385560"/>
+            </a:xfrm>
+            <a:prstGeom prst="rect">
+              <a:avLst/>
+            </a:prstGeom>
+            <a:noFill/>
+            <a:ln w="9525">
+              <a:solidFill>
+                <a:schemeClr val="tx1">
+                  <a:alpha val="50000"/>
+                </a:schemeClr>
+              </a:solidFill>
+            </a:ln>
+          </p:spPr>
+          <p:style>
+            <a:lnRef idx="2">
+              <a:schemeClr val="accent1">
+                <a:shade val="15000"/>
+              </a:schemeClr>
+            </a:lnRef>
+            <a:fillRef idx="1">
+              <a:schemeClr val="accent1"/>
+            </a:fillRef>
+            <a:effectRef idx="0">
+              <a:schemeClr val="accent1"/>
+            </a:effectRef>
+            <a:fontRef idx="minor">
+              <a:schemeClr val="lt1"/>
+            </a:fontRef>
+          </p:style>
+          <p:txBody>
+            <a:bodyPr rtlCol="0" anchor="ctr"/>
+            <a:lstStyle/>
+            <a:p>
+              <a:pPr algn="ctr"/>
+              <a:endParaRPr lang="ko-KR" altLang="en-US" sz="1000">
+                <a:solidFill>
+                  <a:schemeClr val="bg2">
+                    <a:lumMod val="50000"/>
+                  </a:schemeClr>
+                </a:solidFill>
+                <a:latin typeface="바탕체" panose="02030609000101010101" pitchFamily="17" charset="-127"/>
+                <a:ea typeface="바탕체" panose="02030609000101010101" pitchFamily="17" charset="-127"/>
+              </a:endParaRPr>
+            </a:p>
+          </p:txBody>
+        </p:sp>
+        <p:sp>
+          <p:nvSpPr>
+            <p:cNvPr id="198" name="직사각형 197">
+              <a:extLst>
+                <a:ext uri="{FF2B5EF4-FFF2-40B4-BE49-F238E27FC236}">
+                  <a16:creationId xmlns:a16="http://schemas.microsoft.com/office/drawing/2014/main" id="{F418BB52-23F6-580D-3352-DB44864FC610}"/>
+                </a:ext>
+              </a:extLst>
+            </p:cNvPr>
+            <p:cNvSpPr/>
+            <p:nvPr/>
+          </p:nvSpPr>
+          <p:spPr>
+            <a:xfrm flipV="1">
+              <a:off x="9227992" y="2445700"/>
+              <a:ext cx="811357" cy="385560"/>
+            </a:xfrm>
+            <a:prstGeom prst="rect">
+              <a:avLst/>
+            </a:prstGeom>
+            <a:noFill/>
+            <a:ln w="9525">
+              <a:solidFill>
+                <a:schemeClr val="tx1">
+                  <a:alpha val="50000"/>
+                </a:schemeClr>
+              </a:solidFill>
+            </a:ln>
+          </p:spPr>
+          <p:style>
+            <a:lnRef idx="2">
+              <a:schemeClr val="accent1">
+                <a:shade val="15000"/>
+              </a:schemeClr>
+            </a:lnRef>
+            <a:fillRef idx="1">
+              <a:schemeClr val="accent1"/>
+            </a:fillRef>
+            <a:effectRef idx="0">
+              <a:schemeClr val="accent1"/>
+            </a:effectRef>
+            <a:fontRef idx="minor">
+              <a:schemeClr val="lt1"/>
+            </a:fontRef>
+          </p:style>
+          <p:txBody>
+            <a:bodyPr rtlCol="0" anchor="ctr"/>
+            <a:lstStyle/>
+            <a:p>
+              <a:pPr algn="ctr"/>
+              <a:endParaRPr lang="ko-KR" altLang="en-US" sz="1000">
+                <a:solidFill>
+                  <a:schemeClr val="bg2">
+                    <a:lumMod val="50000"/>
+                  </a:schemeClr>
+                </a:solidFill>
+                <a:latin typeface="바탕체" panose="02030609000101010101" pitchFamily="17" charset="-127"/>
+                <a:ea typeface="바탕체" panose="02030609000101010101" pitchFamily="17" charset="-127"/>
+              </a:endParaRPr>
+            </a:p>
+          </p:txBody>
+        </p:sp>
+        <p:sp>
+          <p:nvSpPr>
+            <p:cNvPr id="199" name="직사각형 198">
+              <a:extLst>
+                <a:ext uri="{FF2B5EF4-FFF2-40B4-BE49-F238E27FC236}">
+                  <a16:creationId xmlns:a16="http://schemas.microsoft.com/office/drawing/2014/main" id="{504ED195-D354-C73C-81FE-ABD33E587022}"/>
+                </a:ext>
+              </a:extLst>
+            </p:cNvPr>
+            <p:cNvSpPr/>
+            <p:nvPr/>
+          </p:nvSpPr>
+          <p:spPr>
+            <a:xfrm flipV="1">
+              <a:off x="9227992" y="2875419"/>
+              <a:ext cx="811357" cy="385560"/>
+            </a:xfrm>
+            <a:prstGeom prst="rect">
+              <a:avLst/>
+            </a:prstGeom>
+            <a:noFill/>
+            <a:ln w="9525">
+              <a:solidFill>
+                <a:schemeClr val="tx1">
+                  <a:alpha val="50000"/>
+                </a:schemeClr>
+              </a:solidFill>
+            </a:ln>
+          </p:spPr>
+          <p:style>
+            <a:lnRef idx="2">
+              <a:schemeClr val="accent1">
+                <a:shade val="15000"/>
+              </a:schemeClr>
+            </a:lnRef>
+            <a:fillRef idx="1">
+              <a:schemeClr val="accent1"/>
+            </a:fillRef>
+            <a:effectRef idx="0">
+              <a:schemeClr val="accent1"/>
+            </a:effectRef>
+            <a:fontRef idx="minor">
+              <a:schemeClr val="lt1"/>
+            </a:fontRef>
+          </p:style>
+          <p:txBody>
+            <a:bodyPr rtlCol="0" anchor="ctr"/>
+            <a:lstStyle/>
+            <a:p>
+              <a:pPr algn="ctr"/>
+              <a:endParaRPr lang="ko-KR" altLang="en-US" sz="1000">
+                <a:solidFill>
+                  <a:schemeClr val="bg2">
+                    <a:lumMod val="50000"/>
+                  </a:schemeClr>
+                </a:solidFill>
+                <a:latin typeface="바탕체" panose="02030609000101010101" pitchFamily="17" charset="-127"/>
+                <a:ea typeface="바탕체" panose="02030609000101010101" pitchFamily="17" charset="-127"/>
+              </a:endParaRPr>
+            </a:p>
+          </p:txBody>
+        </p:sp>
+        <p:sp>
+          <p:nvSpPr>
+            <p:cNvPr id="200" name="직사각형 199">
+              <a:extLst>
+                <a:ext uri="{FF2B5EF4-FFF2-40B4-BE49-F238E27FC236}">
+                  <a16:creationId xmlns:a16="http://schemas.microsoft.com/office/drawing/2014/main" id="{F0CF0730-F0D3-E6AA-A1DE-7A82C7E31187}"/>
+                </a:ext>
+              </a:extLst>
+            </p:cNvPr>
+            <p:cNvSpPr/>
+            <p:nvPr/>
+          </p:nvSpPr>
+          <p:spPr>
+            <a:xfrm flipV="1">
+              <a:off x="9227992" y="3292239"/>
+              <a:ext cx="811357" cy="385560"/>
+            </a:xfrm>
+            <a:prstGeom prst="rect">
+              <a:avLst/>
+            </a:prstGeom>
+            <a:noFill/>
+            <a:ln w="9525">
+              <a:solidFill>
+                <a:schemeClr val="tx1">
+                  <a:alpha val="50000"/>
+                </a:schemeClr>
+              </a:solidFill>
+            </a:ln>
+          </p:spPr>
+          <p:style>
+            <a:lnRef idx="2">
+              <a:schemeClr val="accent1">
+                <a:shade val="15000"/>
+              </a:schemeClr>
+            </a:lnRef>
+            <a:fillRef idx="1">
+              <a:schemeClr val="accent1"/>
+            </a:fillRef>
+            <a:effectRef idx="0">
+              <a:schemeClr val="accent1"/>
+            </a:effectRef>
+            <a:fontRef idx="minor">
+              <a:schemeClr val="lt1"/>
+            </a:fontRef>
+          </p:style>
+          <p:txBody>
+            <a:bodyPr rtlCol="0" anchor="ctr"/>
+            <a:lstStyle/>
+            <a:p>
+              <a:pPr algn="ctr"/>
+              <a:endParaRPr lang="ko-KR" altLang="en-US" sz="1000">
+                <a:solidFill>
+                  <a:schemeClr val="bg2">
+                    <a:lumMod val="50000"/>
+                  </a:schemeClr>
+                </a:solidFill>
+                <a:latin typeface="바탕체" panose="02030609000101010101" pitchFamily="17" charset="-127"/>
+                <a:ea typeface="바탕체" panose="02030609000101010101" pitchFamily="17" charset="-127"/>
+              </a:endParaRPr>
+            </a:p>
+          </p:txBody>
+        </p:sp>
+        <p:sp>
+          <p:nvSpPr>
+            <p:cNvPr id="201" name="직사각형 200">
+              <a:extLst>
+                <a:ext uri="{FF2B5EF4-FFF2-40B4-BE49-F238E27FC236}">
+                  <a16:creationId xmlns:a16="http://schemas.microsoft.com/office/drawing/2014/main" id="{B4342658-2BB3-B120-1B82-D5D041CBD2CF}"/>
+                </a:ext>
+              </a:extLst>
+            </p:cNvPr>
+            <p:cNvSpPr/>
+            <p:nvPr/>
+          </p:nvSpPr>
+          <p:spPr>
+            <a:xfrm flipV="1">
+              <a:off x="9227992" y="3706613"/>
+              <a:ext cx="811357" cy="385560"/>
+            </a:xfrm>
+            <a:prstGeom prst="rect">
+              <a:avLst/>
+            </a:prstGeom>
+            <a:noFill/>
+            <a:ln w="9525">
+              <a:solidFill>
+                <a:schemeClr val="tx1">
+                  <a:alpha val="50000"/>
+                </a:schemeClr>
+              </a:solidFill>
+            </a:ln>
+          </p:spPr>
+          <p:style>
+            <a:lnRef idx="2">
+              <a:schemeClr val="accent1">
+                <a:shade val="15000"/>
+              </a:schemeClr>
+            </a:lnRef>
+            <a:fillRef idx="1">
+              <a:schemeClr val="accent1"/>
+            </a:fillRef>
+            <a:effectRef idx="0">
+              <a:schemeClr val="accent1"/>
+            </a:effectRef>
+            <a:fontRef idx="minor">
+              <a:schemeClr val="lt1"/>
+            </a:fontRef>
+          </p:style>
+          <p:txBody>
+            <a:bodyPr rtlCol="0" anchor="ctr"/>
+            <a:lstStyle/>
+            <a:p>
+              <a:pPr algn="ctr"/>
+              <a:endParaRPr lang="ko-KR" altLang="en-US" sz="1000">
+                <a:solidFill>
+                  <a:schemeClr val="bg2">
+                    <a:lumMod val="50000"/>
+                  </a:schemeClr>
+                </a:solidFill>
+                <a:latin typeface="바탕체" panose="02030609000101010101" pitchFamily="17" charset="-127"/>
+                <a:ea typeface="바탕체" panose="02030609000101010101" pitchFamily="17" charset="-127"/>
+              </a:endParaRPr>
+            </a:p>
+          </p:txBody>
+        </p:sp>
+        <p:sp>
+          <p:nvSpPr>
+            <p:cNvPr id="202" name="직사각형 201">
+              <a:extLst>
+                <a:ext uri="{FF2B5EF4-FFF2-40B4-BE49-F238E27FC236}">
+                  <a16:creationId xmlns:a16="http://schemas.microsoft.com/office/drawing/2014/main" id="{ECDEF202-C158-3618-5D54-4A9D7A2317F8}"/>
+                </a:ext>
+              </a:extLst>
+            </p:cNvPr>
+            <p:cNvSpPr/>
+            <p:nvPr/>
+          </p:nvSpPr>
+          <p:spPr>
+            <a:xfrm flipV="1">
+              <a:off x="9227992" y="4123433"/>
+              <a:ext cx="811357" cy="385560"/>
+            </a:xfrm>
+            <a:prstGeom prst="rect">
+              <a:avLst/>
+            </a:prstGeom>
+            <a:noFill/>
+            <a:ln w="9525">
+              <a:solidFill>
+                <a:schemeClr val="tx1">
+                  <a:alpha val="50000"/>
+                </a:schemeClr>
+              </a:solidFill>
+            </a:ln>
+          </p:spPr>
+          <p:style>
+            <a:lnRef idx="2">
+              <a:schemeClr val="accent1">
+                <a:shade val="15000"/>
+              </a:schemeClr>
+            </a:lnRef>
+            <a:fillRef idx="1">
+              <a:schemeClr val="accent1"/>
+            </a:fillRef>
+            <a:effectRef idx="0">
+              <a:schemeClr val="accent1"/>
+            </a:effectRef>
+            <a:fontRef idx="minor">
+              <a:schemeClr val="lt1"/>
+            </a:fontRef>
+          </p:style>
+          <p:txBody>
+            <a:bodyPr rtlCol="0" anchor="ctr"/>
+            <a:lstStyle/>
+            <a:p>
+              <a:pPr algn="ctr"/>
+              <a:endParaRPr lang="ko-KR" altLang="en-US" sz="1000">
+                <a:solidFill>
+                  <a:schemeClr val="bg2">
+                    <a:lumMod val="50000"/>
+                  </a:schemeClr>
+                </a:solidFill>
+                <a:latin typeface="바탕체" panose="02030609000101010101" pitchFamily="17" charset="-127"/>
+                <a:ea typeface="바탕체" panose="02030609000101010101" pitchFamily="17" charset="-127"/>
+              </a:endParaRPr>
+            </a:p>
+          </p:txBody>
+        </p:sp>
+        <p:sp>
+          <p:nvSpPr>
+            <p:cNvPr id="203" name="직사각형 202">
+              <a:extLst>
+                <a:ext uri="{FF2B5EF4-FFF2-40B4-BE49-F238E27FC236}">
+                  <a16:creationId xmlns:a16="http://schemas.microsoft.com/office/drawing/2014/main" id="{045FBDF4-0EF7-6FD9-E495-4BB318BB6BBD}"/>
+                </a:ext>
+              </a:extLst>
+            </p:cNvPr>
+            <p:cNvSpPr/>
+            <p:nvPr/>
+          </p:nvSpPr>
+          <p:spPr>
+            <a:xfrm flipV="1">
+              <a:off x="9227992" y="4533537"/>
+              <a:ext cx="811357" cy="385560"/>
+            </a:xfrm>
+            <a:prstGeom prst="rect">
+              <a:avLst/>
+            </a:prstGeom>
+            <a:noFill/>
+            <a:ln w="9525">
+              <a:solidFill>
+                <a:schemeClr val="tx1">
+                  <a:alpha val="50000"/>
+                </a:schemeClr>
+              </a:solidFill>
+            </a:ln>
+          </p:spPr>
+          <p:style>
+            <a:lnRef idx="2">
+              <a:schemeClr val="accent1">
+                <a:shade val="15000"/>
+              </a:schemeClr>
+            </a:lnRef>
+            <a:fillRef idx="1">
+              <a:schemeClr val="accent1"/>
+            </a:fillRef>
+            <a:effectRef idx="0">
+              <a:schemeClr val="accent1"/>
+            </a:effectRef>
+            <a:fontRef idx="minor">
+              <a:schemeClr val="lt1"/>
+            </a:fontRef>
+          </p:style>
+          <p:txBody>
+            <a:bodyPr rtlCol="0" anchor="ctr"/>
+            <a:lstStyle/>
+            <a:p>
+              <a:pPr algn="ctr"/>
+              <a:endParaRPr lang="ko-KR" altLang="en-US" sz="1000">
+                <a:solidFill>
+                  <a:schemeClr val="bg2">
+                    <a:lumMod val="50000"/>
+                  </a:schemeClr>
+                </a:solidFill>
+                <a:latin typeface="바탕체" panose="02030609000101010101" pitchFamily="17" charset="-127"/>
+                <a:ea typeface="바탕체" panose="02030609000101010101" pitchFamily="17" charset="-127"/>
+              </a:endParaRPr>
+            </a:p>
+          </p:txBody>
+        </p:sp>
+      </p:grpSp>
+      <p:sp>
+        <p:nvSpPr>
+          <p:cNvPr id="291" name="TextBox 290">
+            <a:extLst>
+              <a:ext uri="{FF2B5EF4-FFF2-40B4-BE49-F238E27FC236}">
+                <a16:creationId xmlns:a16="http://schemas.microsoft.com/office/drawing/2014/main" id="{6AB933EB-F511-1AC6-D9F8-F6B94493F13D}"/>
+              </a:ext>
+            </a:extLst>
+          </p:cNvPr>
+          <p:cNvSpPr txBox="1"/>
+          <p:nvPr/>
+        </p:nvSpPr>
+        <p:spPr>
+          <a:xfrm>
+            <a:off x="277091" y="286327"/>
+            <a:ext cx="563418" cy="369332"/>
+          </a:xfrm>
+          <a:prstGeom prst="rect">
+            <a:avLst/>
+          </a:prstGeom>
+          <a:noFill/>
+        </p:spPr>
+        <p:txBody>
+          <a:bodyPr wrap="square" rtlCol="0">
+            <a:spAutoFit/>
+          </a:bodyPr>
+          <a:lstStyle/>
+          <a:p>
+            <a:r>
+              <a:rPr lang="en-US" altLang="ko-KR" dirty="0"/>
+              <a:t>?</a:t>
+            </a:r>
+            <a:endParaRPr lang="ko-KR" altLang="en-US" dirty="0"/>
+          </a:p>
+        </p:txBody>
+      </p:sp>
+      <p:sp>
+        <p:nvSpPr>
+          <p:cNvPr id="10" name="직사각형 9">
+            <a:extLst>
+              <a:ext uri="{FF2B5EF4-FFF2-40B4-BE49-F238E27FC236}">
+                <a16:creationId xmlns:a16="http://schemas.microsoft.com/office/drawing/2014/main" id="{D94DA5A4-45A8-F885-8539-59D36C5AF416}"/>
+              </a:ext>
+            </a:extLst>
+          </p:cNvPr>
+          <p:cNvSpPr/>
+          <p:nvPr/>
+        </p:nvSpPr>
+        <p:spPr>
+          <a:xfrm>
+            <a:off x="2912735" y="4970738"/>
+            <a:ext cx="680224" cy="107239"/>
+          </a:xfrm>
+          <a:prstGeom prst="rect">
+            <a:avLst/>
+          </a:prstGeom>
+          <a:noFill/>
+          <a:ln w="9525">
+            <a:solidFill>
+              <a:schemeClr val="tx1"/>
+            </a:solidFill>
+          </a:ln>
+        </p:spPr>
+        <p:style>
+          <a:lnRef idx="2">
+            <a:schemeClr val="accent1">
+              <a:shade val="15000"/>
+            </a:schemeClr>
+          </a:lnRef>
+          <a:fillRef idx="1">
+            <a:schemeClr val="accent1"/>
+          </a:fillRef>
+          <a:effectRef idx="0">
+            <a:schemeClr val="accent1"/>
+          </a:effectRef>
+          <a:fontRef idx="minor">
+            <a:schemeClr val="lt1"/>
+          </a:fontRef>
+        </p:style>
+        <p:txBody>
+          <a:bodyPr rtlCol="0" anchor="ctr"/>
+          <a:lstStyle/>
+          <a:p>
+            <a:pPr algn="ctr"/>
+            <a:endParaRPr lang="ko-KR" altLang="en-US" sz="1000">
+              <a:solidFill>
+                <a:schemeClr val="tx1"/>
+              </a:solidFill>
+              <a:latin typeface="바탕체" panose="02030609000101010101" pitchFamily="17" charset="-127"/>
+              <a:ea typeface="바탕체" panose="02030609000101010101" pitchFamily="17" charset="-127"/>
+            </a:endParaRPr>
+          </a:p>
+        </p:txBody>
+      </p:sp>
+    </p:spTree>
+    <p:extLst>
+      <p:ext uri="{BB962C8B-B14F-4D97-AF65-F5344CB8AC3E}">
+        <p14:creationId xmlns:p14="http://schemas.microsoft.com/office/powerpoint/2010/main" val="2253304215"/>
       </p:ext>
     </p:extLst>
   </p:cSld>
